--- a/yocto_training_all_session_decks/session_decks/D2S4_BSP_Kernel.pptx
+++ b/yocto_training_all_session_decks/session_decks/D2S4_BSP_Kernel.pptx
@@ -5,26 +5,26 @@
     <p:sldMasterId id="2147483648" r:id="rId1"/>
   </p:sldMasterIdLst>
   <p:notesMasterIdLst>
-    <p:notesMasterId r:id="rId8"/>
+    <p:notesMasterId r:id="rId11"/>
   </p:notesMasterIdLst>
   <p:handoutMasterIdLst>
-    <p:handoutMasterId r:id="rId9"/>
+    <p:handoutMasterId r:id="rId12"/>
   </p:handoutMasterIdLst>
   <p:sldIdLst>
-    <p:sldId id="1007" r:id="rId18"/>
-    <p:sldId id="1008" r:id="rId19"/>
-    <p:sldId id="1009" r:id="rId20"/>
-    <p:sldId id="1010" r:id="rId21"/>
-    <p:sldId id="1011" r:id="rId22"/>
-    <p:sldId id="1012" r:id="rId23"/>
-    <p:sldId id="1013" r:id="rId24"/>
-    <p:sldId id="1014" r:id="rId25"/>
-    <p:sldId id="1015" r:id="rId26"/>
+    <p:sldId id="1007" r:id="rId2"/>
+    <p:sldId id="1008" r:id="rId3"/>
+    <p:sldId id="1009" r:id="rId4"/>
+    <p:sldId id="1010" r:id="rId5"/>
+    <p:sldId id="1011" r:id="rId6"/>
+    <p:sldId id="1012" r:id="rId7"/>
+    <p:sldId id="1013" r:id="rId8"/>
+    <p:sldId id="1014" r:id="rId9"/>
+    <p:sldId id="1015" r:id="rId10"/>
   </p:sldIdLst>
   <p:sldSz cx="12192000" cy="6858000"/>
   <p:notesSz cx="6858000" cy="9144000"/>
   <p:custDataLst>
-    <p:tags r:id="rId10"/>
+    <p:tags r:id="rId13"/>
   </p:custDataLst>
   <p:defaultTextStyle>
     <a:defPPr>
@@ -2930,7 +2930,7 @@
           <a:p>
             <a:fld id="{0CEC647C-F50C-4F78-AA33-D7AA6CDA18EE}" type="datetimeFigureOut">
               <a:rPr lang="en-US" smtClean="0"/>
-              <a:t>7/13/2025</a:t>
+              <a:t>6/10/2026</a:t>
             </a:fld>
             <a:endParaRPr lang="en-US"/>
           </a:p>
@@ -3095,7 +3095,7 @@
           <a:p>
             <a:fld id="{3A83341F-E62C-483B-84B4-966F8BE46097}" type="datetimeFigureOut">
               <a:rPr lang="en-US" smtClean="0"/>
-              <a:t>7/13/2025</a:t>
+              <a:t>6/10/2026</a:t>
             </a:fld>
             <a:endParaRPr lang="en-US"/>
           </a:p>
@@ -5179,8 +5179,8 @@
 </p:sldMaster>
 </file>
 
-<file path=ppt/slides/slide10.xml><?xml version="1.0" encoding="utf-8"?>
-<p:sld xmlns:a="http://schemas.openxmlformats.org/drawingml/2006/main" xmlns:p="http://schemas.openxmlformats.org/presentationml/2006/main" xmlns:r="http://schemas.openxmlformats.org/officeDocument/2006/relationships">
+<file path=ppt/slides/slide1.xml><?xml version="1.0" encoding="utf-8"?>
+<p:sld xmlns:a="http://schemas.openxmlformats.org/drawingml/2006/main" xmlns:r="http://schemas.openxmlformats.org/officeDocument/2006/relationships" xmlns:p="http://schemas.openxmlformats.org/presentationml/2006/main">
   <p:cSld>
     <p:spTree>
       <p:nvGrpSpPr>
@@ -5188,7 +5188,93 @@
         <p:cNvGrpSpPr/>
         <p:nvPr/>
       </p:nvGrpSpPr>
-      <p:grpSpPr/>
+      <p:grpSpPr>
+        <a:xfrm>
+          <a:off x="0" y="0"/>
+          <a:ext cx="0" cy="0"/>
+          <a:chOff x="0" y="0"/>
+          <a:chExt cx="0" cy="0"/>
+        </a:xfrm>
+      </p:grpSpPr>
+      <p:sp>
+        <p:nvSpPr>
+          <p:cNvPr id="2" name="Title 1"/>
+          <p:cNvSpPr>
+            <a:spLocks noGrp="1"/>
+          </p:cNvSpPr>
+          <p:nvPr>
+            <p:ph type="ctrTitle"/>
+          </p:nvPr>
+        </p:nvSpPr>
+        <p:spPr/>
+        <p:txBody>
+          <a:bodyPr/>
+          <a:lstStyle/>
+          <a:p>
+            <a:r>
+              <a:rPr sz="4400" b="1">
+                <a:solidFill>
+                  <a:srgbClr val="FFFFFF"/>
+                </a:solidFill>
+                <a:latin typeface="Calibri"/>
+              </a:rPr>
+              <a:t>BSP and Kernel Integration</a:t>
+            </a:r>
+          </a:p>
+        </p:txBody>
+      </p:sp>
+      <p:sp>
+        <p:nvSpPr>
+          <p:cNvPr id="3" name="Subtitle 2"/>
+          <p:cNvSpPr>
+            <a:spLocks noGrp="1"/>
+          </p:cNvSpPr>
+          <p:nvPr>
+            <p:ph type="subTitle" idx="1"/>
+          </p:nvPr>
+        </p:nvSpPr>
+        <p:spPr/>
+        <p:txBody>
+          <a:bodyPr/>
+          <a:lstStyle/>
+          <a:p>
+            <a:r>
+              <a:rPr sz="1800" dirty="0">
+                <a:solidFill>
+                  <a:srgbClr val="FFFFFF"/>
+                </a:solidFill>
+                <a:latin typeface="Calibri"/>
+              </a:rPr>
+              <a:t>Hardware enablement, kernel recipes, device tree, config fragments</a:t>
+            </a:r>
+          </a:p>
+        </p:txBody>
+      </p:sp>
+    </p:spTree>
+  </p:cSld>
+  <p:clrMapOvr>
+    <a:masterClrMapping/>
+  </p:clrMapOvr>
+</p:sld>
+</file>
+
+<file path=ppt/slides/slide2.xml><?xml version="1.0" encoding="utf-8"?>
+<p:sld xmlns:a="http://schemas.openxmlformats.org/drawingml/2006/main" xmlns:r="http://schemas.openxmlformats.org/officeDocument/2006/relationships" xmlns:p="http://schemas.openxmlformats.org/presentationml/2006/main">
+  <p:cSld>
+    <p:spTree>
+      <p:nvGrpSpPr>
+        <p:cNvPr id="1" name=""/>
+        <p:cNvGrpSpPr/>
+        <p:nvPr/>
+      </p:nvGrpSpPr>
+      <p:grpSpPr>
+        <a:xfrm>
+          <a:off x="0" y="0"/>
+          <a:ext cx="0" cy="0"/>
+          <a:chOff x="0" y="0"/>
+          <a:chExt cx="0" cy="0"/>
+        </a:xfrm>
+      </p:grpSpPr>
       <p:sp>
         <p:nvSpPr>
           <p:cNvPr id="2" name="Title 1"/>
@@ -5205,13 +5291,178 @@
           <a:lstStyle/>
           <a:p>
             <a:r>
-              <a:rPr sz="3200" b="1">
-                <a:solidFill>
-                  <a:srgbClr val="CC0066"/>
-                </a:solidFill>
+              <a:rPr sz="3200" b="1" dirty="0">
                 <a:latin typeface="Calibri"/>
               </a:rPr>
-              <a:t>MACHINE Tuning</a:t>
+              <a:t>Session Agenda</a:t>
+            </a:r>
+          </a:p>
+        </p:txBody>
+      </p:sp>
+      <p:sp>
+        <p:nvSpPr>
+          <p:cNvPr id="3" name="TextBox 2"/>
+          <p:cNvSpPr txBox="1"/>
+          <p:nvPr/>
+        </p:nvSpPr>
+        <p:spPr>
+          <a:xfrm>
+            <a:off x="822960" y="1463040"/>
+            <a:ext cx="10515600" cy="5029200"/>
+          </a:xfrm>
+          <a:prstGeom prst="rect">
+            <a:avLst/>
+          </a:prstGeom>
+          <a:noFill/>
+        </p:spPr>
+        <p:txBody>
+          <a:bodyPr wrap="square" lIns="45720" rIns="45720">
+            <a:spAutoFit/>
+          </a:bodyPr>
+          <a:lstStyle/>
+          <a:p>
+            <a:pPr>
+              <a:spcAft>
+                <a:spcPts val="600"/>
+              </a:spcAft>
+            </a:pPr>
+            <a:r>
+              <a:rPr sz="2000" b="0" i="0">
+                <a:solidFill>
+                  <a:srgbClr val="333333"/>
+                </a:solidFill>
+                <a:latin typeface="Calibri"/>
+              </a:rPr>
+              <a:t>1.  BSP layer structure — meta-bsp vs meta-product</a:t>
+            </a:r>
+          </a:p>
+          <a:p>
+            <a:pPr>
+              <a:spcAft>
+                <a:spcPts val="600"/>
+              </a:spcAft>
+            </a:pPr>
+            <a:r>
+              <a:rPr sz="2000" b="0" i="0">
+                <a:solidFill>
+                  <a:srgbClr val="333333"/>
+                </a:solidFill>
+                <a:latin typeface="Calibri"/>
+              </a:rPr>
+              <a:t>2.  MACHINE tuning — CPU features, boot args, storage</a:t>
+            </a:r>
+          </a:p>
+          <a:p>
+            <a:pPr>
+              <a:spcAft>
+                <a:spcPts val="600"/>
+              </a:spcAft>
+            </a:pPr>
+            <a:r>
+              <a:rPr sz="2000" b="0" i="0">
+                <a:solidFill>
+                  <a:srgbClr val="333333"/>
+                </a:solidFill>
+                <a:latin typeface="Calibri"/>
+              </a:rPr>
+              <a:t>3.  Kernel recipe strategy — vendor fork vs mainline</a:t>
+            </a:r>
+          </a:p>
+          <a:p>
+            <a:pPr>
+              <a:spcAft>
+                <a:spcPts val="600"/>
+              </a:spcAft>
+            </a:pPr>
+            <a:r>
+              <a:rPr sz="2000" b="0" i="0">
+                <a:solidFill>
+                  <a:srgbClr val="333333"/>
+                </a:solidFill>
+                <a:latin typeface="Calibri"/>
+              </a:rPr>
+              <a:t>4.  Device tree workflow</a:t>
+            </a:r>
+          </a:p>
+          <a:p>
+            <a:pPr>
+              <a:spcAft>
+                <a:spcPts val="600"/>
+              </a:spcAft>
+            </a:pPr>
+            <a:r>
+              <a:rPr sz="2000" b="0" i="0">
+                <a:solidFill>
+                  <a:srgbClr val="333333"/>
+                </a:solidFill>
+                <a:latin typeface="Calibri"/>
+              </a:rPr>
+              <a:t>5.  Kernel configuration fragments</a:t>
+            </a:r>
+          </a:p>
+          <a:p>
+            <a:pPr>
+              <a:spcAft>
+                <a:spcPts val="600"/>
+              </a:spcAft>
+            </a:pPr>
+            <a:r>
+              <a:rPr sz="2000" b="0" i="0">
+                <a:solidFill>
+                  <a:srgbClr val="333333"/>
+                </a:solidFill>
+                <a:latin typeface="Calibri"/>
+              </a:rPr>
+              <a:t>6.  Building and inspecting the kernel</a:t>
+            </a:r>
+          </a:p>
+        </p:txBody>
+      </p:sp>
+    </p:spTree>
+  </p:cSld>
+  <p:clrMapOvr>
+    <a:masterClrMapping/>
+  </p:clrMapOvr>
+</p:sld>
+</file>
+
+<file path=ppt/slides/slide3.xml><?xml version="1.0" encoding="utf-8"?>
+<p:sld xmlns:a="http://schemas.openxmlformats.org/drawingml/2006/main" xmlns:r="http://schemas.openxmlformats.org/officeDocument/2006/relationships" xmlns:p="http://schemas.openxmlformats.org/presentationml/2006/main">
+  <p:cSld>
+    <p:spTree>
+      <p:nvGrpSpPr>
+        <p:cNvPr id="1" name=""/>
+        <p:cNvGrpSpPr/>
+        <p:nvPr/>
+      </p:nvGrpSpPr>
+      <p:grpSpPr>
+        <a:xfrm>
+          <a:off x="0" y="0"/>
+          <a:ext cx="0" cy="0"/>
+          <a:chOff x="0" y="0"/>
+          <a:chExt cx="0" cy="0"/>
+        </a:xfrm>
+      </p:grpSpPr>
+      <p:sp>
+        <p:nvSpPr>
+          <p:cNvPr id="2" name="Title 1"/>
+          <p:cNvSpPr>
+            <a:spLocks noGrp="1"/>
+          </p:cNvSpPr>
+          <p:nvPr>
+            <p:ph type="title"/>
+          </p:nvPr>
+        </p:nvSpPr>
+        <p:spPr/>
+        <p:txBody>
+          <a:bodyPr/>
+          <a:lstStyle/>
+          <a:p>
+            <a:r>
+              <a:rPr sz="3200" b="1" dirty="0">
+                <a:latin typeface="Calibri"/>
+              </a:rPr>
+              <a:t>BSP Layer Design</a:t>
             </a:r>
           </a:p>
         </p:txBody>
@@ -5233,7 +5484,724 @@
           <a:noFill/>
         </p:spPr>
         <p:txBody>
-          <a:bodyPr wrap="square" anchor="t" lIns="45720" rIns="45720">
+          <a:bodyPr wrap="square" lIns="45720" rIns="45720" anchor="t">
+            <a:spAutoFit/>
+          </a:bodyPr>
+          <a:lstStyle/>
+          <a:p>
+            <a:pPr algn="l"/>
+            <a:r>
+              <a:rPr sz="1500" b="0" i="1">
+                <a:solidFill>
+                  <a:srgbClr val="666666"/>
+                </a:solidFill>
+                <a:latin typeface="Calibri"/>
+              </a:rPr>
+              <a:t>Split hardware-specific stuff from product-specific stuff.</a:t>
+            </a:r>
+          </a:p>
+        </p:txBody>
+      </p:sp>
+      <p:sp>
+        <p:nvSpPr>
+          <p:cNvPr id="4" name="Rounded Rectangle 3"/>
+          <p:cNvSpPr/>
+          <p:nvPr/>
+        </p:nvSpPr>
+        <p:spPr>
+          <a:xfrm>
+            <a:off x="822960" y="1783080"/>
+            <a:ext cx="5120640" cy="4297680"/>
+          </a:xfrm>
+          <a:prstGeom prst="roundRect">
+            <a:avLst/>
+          </a:prstGeom>
+          <a:solidFill>
+            <a:srgbClr val="FCE4EC"/>
+          </a:solidFill>
+          <a:ln w="6350">
+            <a:solidFill>
+              <a:srgbClr val="CC0066"/>
+            </a:solidFill>
+          </a:ln>
+          <a:effectLst/>
+        </p:spPr>
+        <p:style>
+          <a:lnRef idx="1">
+            <a:schemeClr val="accent1"/>
+          </a:lnRef>
+          <a:fillRef idx="3">
+            <a:schemeClr val="accent1"/>
+          </a:fillRef>
+          <a:effectRef idx="2">
+            <a:schemeClr val="accent1"/>
+          </a:effectRef>
+          <a:fontRef idx="minor">
+            <a:schemeClr val="lt1"/>
+          </a:fontRef>
+        </p:style>
+        <p:txBody>
+          <a:bodyPr rtlCol="0" anchor="ctr"/>
+          <a:lstStyle/>
+          <a:p>
+            <a:pPr algn="ctr"/>
+            <a:endParaRPr/>
+          </a:p>
+        </p:txBody>
+      </p:sp>
+      <p:sp>
+        <p:nvSpPr>
+          <p:cNvPr id="5" name="TextBox 4"/>
+          <p:cNvSpPr txBox="1"/>
+          <p:nvPr/>
+        </p:nvSpPr>
+        <p:spPr>
+          <a:xfrm>
+            <a:off x="960120" y="1920240"/>
+            <a:ext cx="4937760" cy="457200"/>
+          </a:xfrm>
+          <a:prstGeom prst="rect">
+            <a:avLst/>
+          </a:prstGeom>
+          <a:noFill/>
+        </p:spPr>
+        <p:txBody>
+          <a:bodyPr wrap="square" lIns="45720" rIns="45720" anchor="t">
+            <a:spAutoFit/>
+          </a:bodyPr>
+          <a:lstStyle/>
+          <a:p>
+            <a:pPr algn="l"/>
+            <a:r>
+              <a:rPr sz="1800" b="1" i="0">
+                <a:solidFill>
+                  <a:srgbClr val="CC0066"/>
+                </a:solidFill>
+                <a:latin typeface="Calibri"/>
+              </a:rPr>
+              <a:t>meta-yourbsp</a:t>
+            </a:r>
+          </a:p>
+        </p:txBody>
+      </p:sp>
+      <p:sp>
+        <p:nvSpPr>
+          <p:cNvPr id="6" name="TextBox 5"/>
+          <p:cNvSpPr txBox="1"/>
+          <p:nvPr/>
+        </p:nvSpPr>
+        <p:spPr>
+          <a:xfrm>
+            <a:off x="960120" y="2468880"/>
+            <a:ext cx="4937760" cy="3416320"/>
+          </a:xfrm>
+          <a:prstGeom prst="rect">
+            <a:avLst/>
+          </a:prstGeom>
+          <a:noFill/>
+        </p:spPr>
+        <p:txBody>
+          <a:bodyPr wrap="square" lIns="45720" rIns="45720">
+            <a:spAutoFit/>
+          </a:bodyPr>
+          <a:lstStyle/>
+          <a:p>
+            <a:pPr>
+              <a:spcAft>
+                <a:spcPts val="400"/>
+              </a:spcAft>
+            </a:pPr>
+            <a:r>
+              <a:rPr sz="1600" b="1" i="0">
+                <a:solidFill>
+                  <a:srgbClr val="CC0066"/>
+                </a:solidFill>
+                <a:latin typeface="Calibri"/>
+              </a:rPr>
+              <a:t>Purpose</a:t>
+            </a:r>
+          </a:p>
+          <a:p>
+            <a:pPr>
+              <a:spcAft>
+                <a:spcPts val="800"/>
+              </a:spcAft>
+            </a:pPr>
+            <a:r>
+              <a:rPr sz="1600" b="0" i="0">
+                <a:solidFill>
+                  <a:srgbClr val="333333"/>
+                </a:solidFill>
+                <a:latin typeface="Calibri"/>
+              </a:rPr>
+              <a:t>Enable the hardware. Nothing else.</a:t>
+            </a:r>
+          </a:p>
+          <a:p>
+            <a:pPr>
+              <a:spcAft>
+                <a:spcPts val="400"/>
+              </a:spcAft>
+            </a:pPr>
+            <a:r>
+              <a:rPr sz="1600" b="1" i="0">
+                <a:solidFill>
+                  <a:srgbClr val="CC0066"/>
+                </a:solidFill>
+                <a:latin typeface="Calibri"/>
+              </a:rPr>
+              <a:t>Contents</a:t>
+            </a:r>
+          </a:p>
+          <a:p>
+            <a:pPr>
+              <a:spcAft>
+                <a:spcPts val="400"/>
+              </a:spcAft>
+            </a:pPr>
+            <a:r>
+              <a:rPr sz="1600" b="0" i="0">
+                <a:solidFill>
+                  <a:srgbClr val="333333"/>
+                </a:solidFill>
+                <a:latin typeface="Calibri"/>
+              </a:rPr>
+              <a:t>• MACHINE config files</a:t>
+            </a:r>
+          </a:p>
+          <a:p>
+            <a:pPr>
+              <a:spcAft>
+                <a:spcPts val="400"/>
+              </a:spcAft>
+            </a:pPr>
+            <a:r>
+              <a:rPr sz="1600" b="0" i="0">
+                <a:solidFill>
+                  <a:srgbClr val="333333"/>
+                </a:solidFill>
+                <a:latin typeface="Calibri"/>
+              </a:rPr>
+              <a:t>• Kernel recipe / bbappend</a:t>
+            </a:r>
+          </a:p>
+          <a:p>
+            <a:pPr>
+              <a:spcAft>
+                <a:spcPts val="400"/>
+              </a:spcAft>
+            </a:pPr>
+            <a:r>
+              <a:rPr sz="1600" b="0" i="0">
+                <a:solidFill>
+                  <a:srgbClr val="333333"/>
+                </a:solidFill>
+                <a:latin typeface="Calibri"/>
+              </a:rPr>
+              <a:t>• Bootloader recipe</a:t>
+            </a:r>
+          </a:p>
+          <a:p>
+            <a:pPr>
+              <a:spcAft>
+                <a:spcPts val="400"/>
+              </a:spcAft>
+            </a:pPr>
+            <a:r>
+              <a:rPr sz="1600" b="0" i="0">
+                <a:solidFill>
+                  <a:srgbClr val="333333"/>
+                </a:solidFill>
+                <a:latin typeface="Calibri"/>
+              </a:rPr>
+              <a:t>• Device tree sources</a:t>
+            </a:r>
+          </a:p>
+          <a:p>
+            <a:pPr>
+              <a:spcAft>
+                <a:spcPts val="400"/>
+              </a:spcAft>
+            </a:pPr>
+            <a:r>
+              <a:rPr sz="1600" b="0" i="0">
+                <a:solidFill>
+                  <a:srgbClr val="333333"/>
+                </a:solidFill>
+                <a:latin typeface="Calibri"/>
+              </a:rPr>
+              <a:t>• Firmware blobs</a:t>
+            </a:r>
+          </a:p>
+          <a:p>
+            <a:pPr>
+              <a:spcAft>
+                <a:spcPts val="800"/>
+              </a:spcAft>
+            </a:pPr>
+            <a:r>
+              <a:rPr sz="1600" b="0" i="0">
+                <a:solidFill>
+                  <a:srgbClr val="333333"/>
+                </a:solidFill>
+                <a:latin typeface="Calibri"/>
+              </a:rPr>
+              <a:t>• Hardware-specific drivers</a:t>
+            </a:r>
+          </a:p>
+          <a:p>
+            <a:pPr>
+              <a:spcAft>
+                <a:spcPts val="400"/>
+              </a:spcAft>
+            </a:pPr>
+            <a:r>
+              <a:rPr sz="1600" b="1" i="0">
+                <a:solidFill>
+                  <a:srgbClr val="CC0066"/>
+                </a:solidFill>
+                <a:latin typeface="Calibri"/>
+              </a:rPr>
+              <a:t>Reused</a:t>
+            </a:r>
+          </a:p>
+          <a:p>
+            <a:pPr>
+              <a:spcAft>
+                <a:spcPts val="400"/>
+              </a:spcAft>
+            </a:pPr>
+            <a:r>
+              <a:rPr sz="1600" b="0" i="1">
+                <a:solidFill>
+                  <a:srgbClr val="333333"/>
+                </a:solidFill>
+                <a:latin typeface="Calibri"/>
+              </a:rPr>
+              <a:t>Across all products on this hardware</a:t>
+            </a:r>
+          </a:p>
+        </p:txBody>
+      </p:sp>
+      <p:sp>
+        <p:nvSpPr>
+          <p:cNvPr id="7" name="Rounded Rectangle 6"/>
+          <p:cNvSpPr/>
+          <p:nvPr/>
+        </p:nvSpPr>
+        <p:spPr>
+          <a:xfrm>
+            <a:off x="6263640" y="1783080"/>
+            <a:ext cx="5120640" cy="4297680"/>
+          </a:xfrm>
+          <a:prstGeom prst="roundRect">
+            <a:avLst/>
+          </a:prstGeom>
+          <a:solidFill>
+            <a:srgbClr val="E9D8F0"/>
+          </a:solidFill>
+          <a:ln w="6350">
+            <a:solidFill>
+              <a:srgbClr val="663399"/>
+            </a:solidFill>
+          </a:ln>
+          <a:effectLst/>
+        </p:spPr>
+        <p:style>
+          <a:lnRef idx="1">
+            <a:schemeClr val="accent1"/>
+          </a:lnRef>
+          <a:fillRef idx="3">
+            <a:schemeClr val="accent1"/>
+          </a:fillRef>
+          <a:effectRef idx="2">
+            <a:schemeClr val="accent1"/>
+          </a:effectRef>
+          <a:fontRef idx="minor">
+            <a:schemeClr val="lt1"/>
+          </a:fontRef>
+        </p:style>
+        <p:txBody>
+          <a:bodyPr rtlCol="0" anchor="ctr"/>
+          <a:lstStyle/>
+          <a:p>
+            <a:pPr algn="ctr"/>
+            <a:endParaRPr/>
+          </a:p>
+        </p:txBody>
+      </p:sp>
+      <p:sp>
+        <p:nvSpPr>
+          <p:cNvPr id="8" name="TextBox 7"/>
+          <p:cNvSpPr txBox="1"/>
+          <p:nvPr/>
+        </p:nvSpPr>
+        <p:spPr>
+          <a:xfrm>
+            <a:off x="6400800" y="1920240"/>
+            <a:ext cx="4937760" cy="457200"/>
+          </a:xfrm>
+          <a:prstGeom prst="rect">
+            <a:avLst/>
+          </a:prstGeom>
+          <a:noFill/>
+        </p:spPr>
+        <p:txBody>
+          <a:bodyPr wrap="square" lIns="45720" rIns="45720" anchor="t">
+            <a:spAutoFit/>
+          </a:bodyPr>
+          <a:lstStyle/>
+          <a:p>
+            <a:pPr algn="l"/>
+            <a:r>
+              <a:rPr sz="1800" b="1" i="0">
+                <a:solidFill>
+                  <a:srgbClr val="663399"/>
+                </a:solidFill>
+                <a:latin typeface="Calibri"/>
+              </a:rPr>
+              <a:t>meta-yourproduct</a:t>
+            </a:r>
+          </a:p>
+        </p:txBody>
+      </p:sp>
+      <p:sp>
+        <p:nvSpPr>
+          <p:cNvPr id="9" name="TextBox 8"/>
+          <p:cNvSpPr txBox="1"/>
+          <p:nvPr/>
+        </p:nvSpPr>
+        <p:spPr>
+          <a:xfrm>
+            <a:off x="6400800" y="2468880"/>
+            <a:ext cx="4937760" cy="3416320"/>
+          </a:xfrm>
+          <a:prstGeom prst="rect">
+            <a:avLst/>
+          </a:prstGeom>
+          <a:noFill/>
+        </p:spPr>
+        <p:txBody>
+          <a:bodyPr wrap="square" lIns="45720" rIns="45720">
+            <a:spAutoFit/>
+          </a:bodyPr>
+          <a:lstStyle/>
+          <a:p>
+            <a:pPr>
+              <a:spcAft>
+                <a:spcPts val="400"/>
+              </a:spcAft>
+            </a:pPr>
+            <a:r>
+              <a:rPr sz="1600" b="1" i="0" dirty="0">
+                <a:solidFill>
+                  <a:srgbClr val="663399"/>
+                </a:solidFill>
+                <a:latin typeface="Calibri"/>
+              </a:rPr>
+              <a:t>Purpose</a:t>
+            </a:r>
+          </a:p>
+          <a:p>
+            <a:pPr>
+              <a:spcAft>
+                <a:spcPts val="800"/>
+              </a:spcAft>
+            </a:pPr>
+            <a:r>
+              <a:rPr sz="1600" b="0" i="0" dirty="0">
+                <a:solidFill>
+                  <a:srgbClr val="333333"/>
+                </a:solidFill>
+                <a:latin typeface="Calibri"/>
+              </a:rPr>
+              <a:t>Your application logic, branding, business rules.</a:t>
+            </a:r>
+          </a:p>
+          <a:p>
+            <a:pPr>
+              <a:spcAft>
+                <a:spcPts val="400"/>
+              </a:spcAft>
+            </a:pPr>
+            <a:r>
+              <a:rPr sz="1600" b="1" i="0" dirty="0">
+                <a:solidFill>
+                  <a:srgbClr val="663399"/>
+                </a:solidFill>
+                <a:latin typeface="Calibri"/>
+              </a:rPr>
+              <a:t>Contents</a:t>
+            </a:r>
+          </a:p>
+          <a:p>
+            <a:pPr>
+              <a:spcAft>
+                <a:spcPts val="400"/>
+              </a:spcAft>
+            </a:pPr>
+            <a:r>
+              <a:rPr sz="1600" b="0" i="0" dirty="0">
+                <a:solidFill>
+                  <a:srgbClr val="333333"/>
+                </a:solidFill>
+                <a:latin typeface="Calibri"/>
+              </a:rPr>
+              <a:t>• Application recipes</a:t>
+            </a:r>
+          </a:p>
+          <a:p>
+            <a:pPr>
+              <a:spcAft>
+                <a:spcPts val="400"/>
+              </a:spcAft>
+            </a:pPr>
+            <a:r>
+              <a:rPr sz="1600" b="0" i="0" dirty="0">
+                <a:solidFill>
+                  <a:srgbClr val="333333"/>
+                </a:solidFill>
+                <a:latin typeface="Calibri"/>
+              </a:rPr>
+              <a:t>• Custom </a:t>
+            </a:r>
+            <a:r>
+              <a:rPr sz="1600" b="0" i="0" dirty="0" err="1">
+                <a:solidFill>
+                  <a:srgbClr val="333333"/>
+                </a:solidFill>
+                <a:latin typeface="Calibri"/>
+              </a:rPr>
+              <a:t>systemd</a:t>
+            </a:r>
+            <a:r>
+              <a:rPr sz="1600" b="0" i="0" dirty="0">
+                <a:solidFill>
+                  <a:srgbClr val="333333"/>
+                </a:solidFill>
+                <a:latin typeface="Calibri"/>
+              </a:rPr>
+              <a:t> units</a:t>
+            </a:r>
+          </a:p>
+          <a:p>
+            <a:pPr>
+              <a:spcAft>
+                <a:spcPts val="400"/>
+              </a:spcAft>
+            </a:pPr>
+            <a:r>
+              <a:rPr sz="1600" b="0" i="0" dirty="0">
+                <a:solidFill>
+                  <a:srgbClr val="333333"/>
+                </a:solidFill>
+                <a:latin typeface="Calibri"/>
+              </a:rPr>
+              <a:t>• Branding (splash, hostname)</a:t>
+            </a:r>
+          </a:p>
+          <a:p>
+            <a:pPr>
+              <a:spcAft>
+                <a:spcPts val="400"/>
+              </a:spcAft>
+            </a:pPr>
+            <a:r>
+              <a:rPr sz="1600" b="0" i="0" dirty="0">
+                <a:solidFill>
+                  <a:srgbClr val="333333"/>
+                </a:solidFill>
+                <a:latin typeface="Calibri"/>
+              </a:rPr>
+              <a:t>• Image recipes</a:t>
+            </a:r>
+          </a:p>
+          <a:p>
+            <a:pPr>
+              <a:spcAft>
+                <a:spcPts val="400"/>
+              </a:spcAft>
+            </a:pPr>
+            <a:r>
+              <a:rPr sz="1600" b="0" i="0" dirty="0">
+                <a:solidFill>
+                  <a:srgbClr val="333333"/>
+                </a:solidFill>
+                <a:latin typeface="Calibri"/>
+              </a:rPr>
+              <a:t>• Per-product DT overlays</a:t>
+            </a:r>
+          </a:p>
+          <a:p>
+            <a:pPr>
+              <a:spcAft>
+                <a:spcPts val="800"/>
+              </a:spcAft>
+            </a:pPr>
+            <a:r>
+              <a:rPr sz="1600" b="0" i="0" dirty="0">
+                <a:solidFill>
+                  <a:srgbClr val="333333"/>
+                </a:solidFill>
+                <a:latin typeface="Calibri"/>
+              </a:rPr>
+              <a:t>• Customer-specific configs</a:t>
+            </a:r>
+          </a:p>
+          <a:p>
+            <a:pPr>
+              <a:spcAft>
+                <a:spcPts val="400"/>
+              </a:spcAft>
+            </a:pPr>
+            <a:r>
+              <a:rPr sz="1600" b="1" i="0" dirty="0">
+                <a:solidFill>
+                  <a:srgbClr val="663399"/>
+                </a:solidFill>
+                <a:latin typeface="Calibri"/>
+              </a:rPr>
+              <a:t>Reused</a:t>
+            </a:r>
+          </a:p>
+          <a:p>
+            <a:pPr>
+              <a:spcAft>
+                <a:spcPts val="400"/>
+              </a:spcAft>
+            </a:pPr>
+            <a:r>
+              <a:rPr sz="1600" b="0" i="1" dirty="0">
+                <a:solidFill>
+                  <a:srgbClr val="333333"/>
+                </a:solidFill>
+                <a:latin typeface="Calibri"/>
+              </a:rPr>
+              <a:t>Just for this product line</a:t>
+            </a:r>
+          </a:p>
+        </p:txBody>
+      </p:sp>
+      <p:sp>
+        <p:nvSpPr>
+          <p:cNvPr id="10" name="Rounded Rectangle 9"/>
+          <p:cNvSpPr/>
+          <p:nvPr/>
+        </p:nvSpPr>
+        <p:spPr>
+          <a:xfrm>
+            <a:off x="822960" y="6217920"/>
+            <a:ext cx="10515600" cy="365760"/>
+          </a:xfrm>
+          <a:prstGeom prst="roundRect">
+            <a:avLst/>
+          </a:prstGeom>
+          <a:solidFill>
+            <a:srgbClr val="FBE6F0"/>
+          </a:solidFill>
+          <a:ln>
+            <a:noFill/>
+          </a:ln>
+          <a:effectLst/>
+        </p:spPr>
+        <p:style>
+          <a:lnRef idx="1">
+            <a:schemeClr val="accent1"/>
+          </a:lnRef>
+          <a:fillRef idx="3">
+            <a:schemeClr val="accent1"/>
+          </a:fillRef>
+          <a:effectRef idx="2">
+            <a:schemeClr val="accent1"/>
+          </a:effectRef>
+          <a:fontRef idx="minor">
+            <a:schemeClr val="lt1"/>
+          </a:fontRef>
+        </p:style>
+        <p:txBody>
+          <a:bodyPr wrap="square" lIns="228600" rIns="228600" rtlCol="0" anchor="ctr"/>
+          <a:lstStyle/>
+          <a:p>
+            <a:pPr algn="l"/>
+            <a:r>
+              <a:rPr sz="1200" b="1">
+                <a:solidFill>
+                  <a:srgbClr val="663399"/>
+                </a:solidFill>
+                <a:latin typeface="Calibri"/>
+              </a:rPr>
+              <a:t>Why split? When you ship a new product on the same hardware, only meta-yourproduct changes.</a:t>
+            </a:r>
+          </a:p>
+        </p:txBody>
+      </p:sp>
+    </p:spTree>
+  </p:cSld>
+  <p:clrMapOvr>
+    <a:masterClrMapping/>
+  </p:clrMapOvr>
+</p:sld>
+</file>
+
+<file path=ppt/slides/slide4.xml><?xml version="1.0" encoding="utf-8"?>
+<p:sld xmlns:a="http://schemas.openxmlformats.org/drawingml/2006/main" xmlns:r="http://schemas.openxmlformats.org/officeDocument/2006/relationships" xmlns:p="http://schemas.openxmlformats.org/presentationml/2006/main">
+  <p:cSld>
+    <p:spTree>
+      <p:nvGrpSpPr>
+        <p:cNvPr id="1" name=""/>
+        <p:cNvGrpSpPr/>
+        <p:nvPr/>
+      </p:nvGrpSpPr>
+      <p:grpSpPr>
+        <a:xfrm>
+          <a:off x="0" y="0"/>
+          <a:ext cx="0" cy="0"/>
+          <a:chOff x="0" y="0"/>
+          <a:chExt cx="0" cy="0"/>
+        </a:xfrm>
+      </p:grpSpPr>
+      <p:sp>
+        <p:nvSpPr>
+          <p:cNvPr id="2" name="Title 1"/>
+          <p:cNvSpPr>
+            <a:spLocks noGrp="1"/>
+          </p:cNvSpPr>
+          <p:nvPr>
+            <p:ph type="title"/>
+          </p:nvPr>
+        </p:nvSpPr>
+        <p:spPr/>
+        <p:txBody>
+          <a:bodyPr/>
+          <a:lstStyle/>
+          <a:p>
+            <a:r>
+              <a:rPr sz="3200" b="1" dirty="0">
+                <a:latin typeface="Calibri"/>
+              </a:rPr>
+              <a:t>MACHINE Tuning</a:t>
+            </a:r>
+          </a:p>
+        </p:txBody>
+      </p:sp>
+      <p:sp>
+        <p:nvSpPr>
+          <p:cNvPr id="3" name="TextBox 2"/>
+          <p:cNvSpPr txBox="1"/>
+          <p:nvPr/>
+        </p:nvSpPr>
+        <p:spPr>
+          <a:xfrm>
+            <a:off x="822960" y="1417320"/>
+            <a:ext cx="10515600" cy="365760"/>
+          </a:xfrm>
+          <a:prstGeom prst="rect">
+            <a:avLst/>
+          </a:prstGeom>
+          <a:noFill/>
+        </p:spPr>
+        <p:txBody>
+          <a:bodyPr wrap="square" lIns="45720" rIns="45720" anchor="t">
             <a:spAutoFit/>
           </a:bodyPr>
           <a:lstStyle/>
@@ -5294,6 +6262,7 @@
           <a:lstStyle/>
           <a:p>
             <a:pPr algn="ctr"/>
+            <a:endParaRPr/>
           </a:p>
         </p:txBody>
       </p:sp>
@@ -5338,6 +6307,7 @@
           <a:lstStyle/>
           <a:p>
             <a:pPr algn="ctr"/>
+            <a:endParaRPr/>
           </a:p>
         </p:txBody>
       </p:sp>
@@ -5349,8 +6319,8 @@
         </p:nvSpPr>
         <p:spPr>
           <a:xfrm>
-            <a:off x="1005840" y="1874519"/>
-            <a:ext cx="10241280" cy="4389120"/>
+            <a:off x="1341120" y="1783080"/>
+            <a:ext cx="10241280" cy="4616648"/>
           </a:xfrm>
           <a:prstGeom prst="rect">
             <a:avLst/>
@@ -5369,7 +6339,7 @@
               </a:spcAft>
             </a:pPr>
             <a:r>
-              <a:rPr sz="1100" i="1">
+              <a:rPr sz="1400" i="1">
                 <a:solidFill>
                   <a:srgbClr val="808080"/>
                 </a:solidFill>
@@ -5385,7 +6355,7 @@
               </a:spcAft>
             </a:pPr>
             <a:r>
-              <a:rPr sz="1100">
+              <a:rPr sz="1400">
                 <a:solidFill>
                   <a:srgbClr val="2D2D2D"/>
                 </a:solidFill>
@@ -5401,7 +6371,7 @@
               </a:spcAft>
             </a:pPr>
             <a:r>
-              <a:rPr sz="1100" i="1">
+              <a:rPr sz="1400" i="1">
                 <a:solidFill>
                   <a:srgbClr val="808080"/>
                 </a:solidFill>
@@ -5417,7 +6387,7 @@
               </a:spcAft>
             </a:pPr>
             <a:r>
-              <a:rPr sz="1100">
+              <a:rPr sz="1400">
                 <a:solidFill>
                   <a:srgbClr val="2D2D2D"/>
                 </a:solidFill>
@@ -5433,7 +6403,7 @@
               </a:spcAft>
             </a:pPr>
             <a:r>
-              <a:rPr sz="1100">
+              <a:rPr sz="1400">
                 <a:solidFill>
                   <a:srgbClr val="2D2D2D"/>
                 </a:solidFill>
@@ -5449,7 +6419,7 @@
               </a:spcAft>
             </a:pPr>
             <a:r>
-              <a:rPr sz="1100" i="1">
+              <a:rPr sz="1400" i="1">
                 <a:solidFill>
                   <a:srgbClr val="808080"/>
                 </a:solidFill>
@@ -5465,7 +6435,7 @@
               </a:spcAft>
             </a:pPr>
             <a:r>
-              <a:rPr sz="1100">
+              <a:rPr sz="1400">
                 <a:solidFill>
                   <a:srgbClr val="2D2D2D"/>
                 </a:solidFill>
@@ -5481,7 +6451,7 @@
               </a:spcAft>
             </a:pPr>
             <a:r>
-              <a:rPr sz="1100">
+              <a:rPr sz="1400">
                 <a:solidFill>
                   <a:srgbClr val="2D2D2D"/>
                 </a:solidFill>
@@ -5497,7 +6467,7 @@
               </a:spcAft>
             </a:pPr>
             <a:r>
-              <a:rPr sz="1100">
+              <a:rPr sz="1400">
                 <a:solidFill>
                   <a:srgbClr val="2D2D2D"/>
                 </a:solidFill>
@@ -5513,7 +6483,7 @@
               </a:spcAft>
             </a:pPr>
             <a:r>
-              <a:rPr sz="1100" i="1">
+              <a:rPr sz="1400" i="1">
                 <a:solidFill>
                   <a:srgbClr val="808080"/>
                 </a:solidFill>
@@ -5529,7 +6499,7 @@
               </a:spcAft>
             </a:pPr>
             <a:r>
-              <a:rPr sz="1100">
+              <a:rPr sz="1400">
                 <a:solidFill>
                   <a:srgbClr val="2D2D2D"/>
                 </a:solidFill>
@@ -5545,7 +6515,7 @@
               </a:spcAft>
             </a:pPr>
             <a:r>
-              <a:rPr sz="1100">
+              <a:rPr sz="1400">
                 <a:solidFill>
                   <a:srgbClr val="2D2D2D"/>
                 </a:solidFill>
@@ -5561,7 +6531,7 @@
               </a:spcAft>
             </a:pPr>
             <a:r>
-              <a:rPr sz="1100" i="1">
+              <a:rPr sz="1400" i="1">
                 <a:solidFill>
                   <a:srgbClr val="808080"/>
                 </a:solidFill>
@@ -5577,7 +6547,7 @@
               </a:spcAft>
             </a:pPr>
             <a:r>
-              <a:rPr sz="1100">
+              <a:rPr sz="1400">
                 <a:solidFill>
                   <a:srgbClr val="2D2D2D"/>
                 </a:solidFill>
@@ -5593,7 +6563,7 @@
               </a:spcAft>
             </a:pPr>
             <a:r>
-              <a:rPr sz="1100">
+              <a:rPr sz="1400">
                 <a:solidFill>
                   <a:srgbClr val="2D2D2D"/>
                 </a:solidFill>
@@ -5609,7 +6579,7 @@
               </a:spcAft>
             </a:pPr>
             <a:r>
-              <a:rPr sz="1100" i="1">
+              <a:rPr sz="1400" i="1">
                 <a:solidFill>
                   <a:srgbClr val="808080"/>
                 </a:solidFill>
@@ -5625,7 +6595,7 @@
               </a:spcAft>
             </a:pPr>
             <a:r>
-              <a:rPr sz="1100">
+              <a:rPr sz="1400">
                 <a:solidFill>
                   <a:srgbClr val="2D2D2D"/>
                 </a:solidFill>
@@ -5641,7 +6611,7 @@
               </a:spcAft>
             </a:pPr>
             <a:r>
-              <a:rPr sz="1100">
+              <a:rPr sz="1400">
                 <a:solidFill>
                   <a:srgbClr val="2D2D2D"/>
                 </a:solidFill>
@@ -5657,7 +6627,7 @@
               </a:spcAft>
             </a:pPr>
             <a:r>
-              <a:rPr sz="1100" i="1">
+              <a:rPr sz="1400" i="1">
                 <a:solidFill>
                   <a:srgbClr val="808080"/>
                 </a:solidFill>
@@ -5673,7 +6643,7 @@
               </a:spcAft>
             </a:pPr>
             <a:r>
-              <a:rPr sz="1100">
+              <a:rPr sz="1400">
                 <a:solidFill>
                   <a:srgbClr val="2D2D2D"/>
                 </a:solidFill>
@@ -5689,7 +6659,7 @@
               </a:spcAft>
             </a:pPr>
             <a:r>
-              <a:rPr sz="1100">
+              <a:rPr sz="1400">
                 <a:solidFill>
                   <a:srgbClr val="2D2D2D"/>
                 </a:solidFill>
@@ -5708,8 +6678,8 @@
 </p:sld>
 </file>
 
-<file path=ppt/slides/slide11.xml><?xml version="1.0" encoding="utf-8"?>
-<p:sld xmlns:a="http://schemas.openxmlformats.org/drawingml/2006/main" xmlns:p="http://schemas.openxmlformats.org/presentationml/2006/main" xmlns:r="http://schemas.openxmlformats.org/officeDocument/2006/relationships">
+<file path=ppt/slides/slide5.xml><?xml version="1.0" encoding="utf-8"?>
+<p:sld xmlns:a="http://schemas.openxmlformats.org/drawingml/2006/main" xmlns:r="http://schemas.openxmlformats.org/officeDocument/2006/relationships" xmlns:p="http://schemas.openxmlformats.org/presentationml/2006/main">
   <p:cSld>
     <p:spTree>
       <p:nvGrpSpPr>
@@ -5717,7 +6687,14 @@
         <p:cNvGrpSpPr/>
         <p:nvPr/>
       </p:nvGrpSpPr>
-      <p:grpSpPr/>
+      <p:grpSpPr>
+        <a:xfrm>
+          <a:off x="0" y="0"/>
+          <a:ext cx="0" cy="0"/>
+          <a:chOff x="0" y="0"/>
+          <a:chExt cx="0" cy="0"/>
+        </a:xfrm>
+      </p:grpSpPr>
       <p:sp>
         <p:nvSpPr>
           <p:cNvPr id="2" name="Title 1"/>
@@ -5734,10 +6711,7 @@
           <a:lstStyle/>
           <a:p>
             <a:r>
-              <a:rPr sz="3200" b="1">
-                <a:solidFill>
-                  <a:srgbClr val="CC0066"/>
-                </a:solidFill>
+              <a:rPr sz="3200" b="1" dirty="0">
                 <a:latin typeface="Calibri"/>
               </a:rPr>
               <a:t>Kernel Recipe Strategy</a:t>
@@ -5762,7 +6736,7 @@
           <a:noFill/>
         </p:spPr>
         <p:txBody>
-          <a:bodyPr wrap="square" anchor="t" lIns="45720" rIns="45720">
+          <a:bodyPr wrap="square" lIns="45720" rIns="45720" anchor="t">
             <a:spAutoFit/>
           </a:bodyPr>
           <a:lstStyle/>
@@ -5817,7 +6791,7 @@
           </a:fontRef>
         </p:style>
         <p:txBody>
-          <a:bodyPr rtlCol="0" anchor="ctr" lIns="182880"/>
+          <a:bodyPr lIns="182880" rtlCol="0" anchor="ctr"/>
           <a:lstStyle/>
           <a:p>
             <a:pPr algn="ctr"/>
@@ -5887,6 +6861,7 @@
           <a:lstStyle/>
           <a:p>
             <a:pPr algn="ctr"/>
+            <a:endParaRPr/>
           </a:p>
         </p:txBody>
       </p:sp>
@@ -5899,7 +6874,7 @@
         <p:spPr>
           <a:xfrm>
             <a:off x="731519" y="2514600"/>
-            <a:ext cx="3337560" cy="3474720"/>
+            <a:ext cx="3337560" cy="3077766"/>
           </a:xfrm>
           <a:prstGeom prst="rect">
             <a:avLst/>
@@ -5918,7 +6893,7 @@
               </a:spcAft>
             </a:pPr>
             <a:r>
-              <a:rPr sz="1200" b="1" i="0">
+              <a:rPr b="1" i="0">
                 <a:solidFill>
                   <a:srgbClr val="CC0066"/>
                 </a:solidFill>
@@ -5934,7 +6909,7 @@
               </a:spcAft>
             </a:pPr>
             <a:r>
-              <a:rPr sz="1100" b="0" i="0">
+              <a:rPr sz="1600" b="0" i="0">
                 <a:solidFill>
                   <a:srgbClr val="333333"/>
                 </a:solidFill>
@@ -5950,7 +6925,7 @@
               </a:spcAft>
             </a:pPr>
             <a:r>
-              <a:rPr sz="1100" b="0" i="0">
+              <a:rPr sz="1600" b="0" i="0">
                 <a:solidFill>
                   <a:srgbClr val="333333"/>
                 </a:solidFill>
@@ -5966,7 +6941,7 @@
               </a:spcAft>
             </a:pPr>
             <a:r>
-              <a:rPr sz="1100" b="0" i="0">
+              <a:rPr sz="1600" b="0" i="0">
                 <a:solidFill>
                   <a:srgbClr val="333333"/>
                 </a:solidFill>
@@ -5981,14 +6956,43 @@
                 <a:spcPts val="400"/>
               </a:spcAft>
             </a:pPr>
-            <a:r>
-              <a:rPr sz="1100" b="0" i="0">
+            <a:endParaRPr sz="1600" b="0" i="0">
+              <a:solidFill>
+                <a:srgbClr val="333333"/>
+              </a:solidFill>
+              <a:latin typeface="Calibri"/>
+            </a:endParaRPr>
+          </a:p>
+          <a:p>
+            <a:pPr>
+              <a:spcAft>
+                <a:spcPts val="400"/>
+              </a:spcAft>
+            </a:pPr>
+            <a:r>
+              <a:rPr b="1" i="0">
+                <a:solidFill>
+                  <a:srgbClr val="CC0066"/>
+                </a:solidFill>
+                <a:latin typeface="Calibri"/>
+              </a:rPr>
+              <a:t>Use when:</a:t>
+            </a:r>
+          </a:p>
+          <a:p>
+            <a:pPr>
+              <a:spcAft>
+                <a:spcPts val="400"/>
+              </a:spcAft>
+            </a:pPr>
+            <a:r>
+              <a:rPr sz="1600" b="0" i="0">
                 <a:solidFill>
                   <a:srgbClr val="333333"/>
                 </a:solidFill>
                 <a:latin typeface="Calibri"/>
               </a:rPr>
-              <a:t/>
+              <a:t>Mainstream HW with</a:t>
             </a:r>
           </a:p>
           <a:p>
@@ -5998,13 +7002,13 @@
               </a:spcAft>
             </a:pPr>
             <a:r>
-              <a:rPr sz="1200" b="1" i="0">
-                <a:solidFill>
-                  <a:srgbClr val="CC0066"/>
+              <a:rPr sz="1600" b="0" i="0">
+                <a:solidFill>
+                  <a:srgbClr val="333333"/>
                 </a:solidFill>
                 <a:latin typeface="Calibri"/>
               </a:rPr>
-              <a:t>Use when:</a:t>
+              <a:t>linux-yocto BSP</a:t>
             </a:r>
           </a:p>
           <a:p>
@@ -6014,13 +7018,13 @@
               </a:spcAft>
             </a:pPr>
             <a:r>
-              <a:rPr sz="1100" b="0" i="0">
+              <a:rPr sz="1600" b="0" i="0">
                 <a:solidFill>
                   <a:srgbClr val="333333"/>
                 </a:solidFill>
                 <a:latin typeface="Calibri"/>
               </a:rPr>
-              <a:t>Mainstream HW with</a:t>
+              <a:t>support (RPi, BBB,</a:t>
             </a:r>
           </a:p>
           <a:p>
@@ -6030,39 +7034,7 @@
               </a:spcAft>
             </a:pPr>
             <a:r>
-              <a:rPr sz="1100" b="0" i="0">
-                <a:solidFill>
-                  <a:srgbClr val="333333"/>
-                </a:solidFill>
-                <a:latin typeface="Calibri"/>
-              </a:rPr>
-              <a:t>linux-yocto BSP</a:t>
-            </a:r>
-          </a:p>
-          <a:p>
-            <a:pPr>
-              <a:spcAft>
-                <a:spcPts val="400"/>
-              </a:spcAft>
-            </a:pPr>
-            <a:r>
-              <a:rPr sz="1100" b="0" i="0">
-                <a:solidFill>
-                  <a:srgbClr val="333333"/>
-                </a:solidFill>
-                <a:latin typeface="Calibri"/>
-              </a:rPr>
-              <a:t>support (RPi, BBB,</a:t>
-            </a:r>
-          </a:p>
-          <a:p>
-            <a:pPr>
-              <a:spcAft>
-                <a:spcPts val="400"/>
-              </a:spcAft>
-            </a:pPr>
-            <a:r>
-              <a:rPr sz="1100" b="0" i="0">
+              <a:rPr sz="1600" b="0" i="0">
                 <a:solidFill>
                   <a:srgbClr val="333333"/>
                 </a:solidFill>
@@ -6110,7 +7082,7 @@
           </a:fontRef>
         </p:style>
         <p:txBody>
-          <a:bodyPr rtlCol="0" anchor="ctr" lIns="182880"/>
+          <a:bodyPr lIns="182880" rtlCol="0" anchor="ctr"/>
           <a:lstStyle/>
           <a:p>
             <a:pPr algn="ctr"/>
@@ -6180,6 +7152,7 @@
           <a:lstStyle/>
           <a:p>
             <a:pPr algn="ctr"/>
+            <a:endParaRPr/>
           </a:p>
         </p:txBody>
       </p:sp>
@@ -6192,7 +7165,7 @@
         <p:spPr>
           <a:xfrm>
             <a:off x="4389120" y="2514600"/>
-            <a:ext cx="3337560" cy="3474720"/>
+            <a:ext cx="3337560" cy="2811026"/>
           </a:xfrm>
           <a:prstGeom prst="rect">
             <a:avLst/>
@@ -6211,7 +7184,7 @@
               </a:spcAft>
             </a:pPr>
             <a:r>
-              <a:rPr sz="1200" b="1" i="0">
+              <a:rPr b="1" i="0">
                 <a:solidFill>
                   <a:srgbClr val="663399"/>
                 </a:solidFill>
@@ -6227,7 +7200,7 @@
               </a:spcAft>
             </a:pPr>
             <a:r>
-              <a:rPr sz="1100" b="0" i="0">
+              <a:rPr sz="1600" b="0" i="0">
                 <a:solidFill>
                   <a:srgbClr val="333333"/>
                 </a:solidFill>
@@ -6243,7 +7216,7 @@
               </a:spcAft>
             </a:pPr>
             <a:r>
-              <a:rPr sz="1100" b="0" i="0">
+              <a:rPr sz="1600" b="0" i="0">
                 <a:solidFill>
                   <a:srgbClr val="333333"/>
                 </a:solidFill>
@@ -6258,14 +7231,43 @@
                 <a:spcPts val="400"/>
               </a:spcAft>
             </a:pPr>
-            <a:r>
-              <a:rPr sz="1100" b="0" i="0">
+            <a:endParaRPr sz="1600" b="0" i="0">
+              <a:solidFill>
+                <a:srgbClr val="333333"/>
+              </a:solidFill>
+              <a:latin typeface="Calibri"/>
+            </a:endParaRPr>
+          </a:p>
+          <a:p>
+            <a:pPr>
+              <a:spcAft>
+                <a:spcPts val="400"/>
+              </a:spcAft>
+            </a:pPr>
+            <a:r>
+              <a:rPr b="1" i="0">
+                <a:solidFill>
+                  <a:srgbClr val="663399"/>
+                </a:solidFill>
+                <a:latin typeface="Calibri"/>
+              </a:rPr>
+              <a:t>Use when:</a:t>
+            </a:r>
+          </a:p>
+          <a:p>
+            <a:pPr>
+              <a:spcAft>
+                <a:spcPts val="400"/>
+              </a:spcAft>
+            </a:pPr>
+            <a:r>
+              <a:rPr sz="1600" b="0" i="0">
                 <a:solidFill>
                   <a:srgbClr val="333333"/>
                 </a:solidFill>
                 <a:latin typeface="Calibri"/>
               </a:rPr>
-              <a:t/>
+              <a:t>Real-time latency</a:t>
             </a:r>
           </a:p>
           <a:p>
@@ -6275,13 +7277,13 @@
               </a:spcAft>
             </a:pPr>
             <a:r>
-              <a:rPr sz="1200" b="1" i="0">
+              <a:rPr b="1" i="0">
                 <a:solidFill>
                   <a:srgbClr val="663399"/>
                 </a:solidFill>
                 <a:latin typeface="Calibri"/>
               </a:rPr>
-              <a:t>Use when:</a:t>
+              <a:t>requirements:</a:t>
             </a:r>
           </a:p>
           <a:p>
@@ -6291,13 +7293,13 @@
               </a:spcAft>
             </a:pPr>
             <a:r>
-              <a:rPr sz="1100" b="0" i="0">
+              <a:rPr sz="1600" b="0" i="0">
                 <a:solidFill>
                   <a:srgbClr val="333333"/>
                 </a:solidFill>
                 <a:latin typeface="Calibri"/>
               </a:rPr>
-              <a:t>Real-time latency</a:t>
+              <a:t>industrial control,</a:t>
             </a:r>
           </a:p>
           <a:p>
@@ -6307,39 +7309,7 @@
               </a:spcAft>
             </a:pPr>
             <a:r>
-              <a:rPr sz="1200" b="1" i="0">
-                <a:solidFill>
-                  <a:srgbClr val="663399"/>
-                </a:solidFill>
-                <a:latin typeface="Calibri"/>
-              </a:rPr>
-              <a:t>requirements:</a:t>
-            </a:r>
-          </a:p>
-          <a:p>
-            <a:pPr>
-              <a:spcAft>
-                <a:spcPts val="400"/>
-              </a:spcAft>
-            </a:pPr>
-            <a:r>
-              <a:rPr sz="1100" b="0" i="0">
-                <a:solidFill>
-                  <a:srgbClr val="333333"/>
-                </a:solidFill>
-                <a:latin typeface="Calibri"/>
-              </a:rPr>
-              <a:t>industrial control,</a:t>
-            </a:r>
-          </a:p>
-          <a:p>
-            <a:pPr>
-              <a:spcAft>
-                <a:spcPts val="400"/>
-              </a:spcAft>
-            </a:pPr>
-            <a:r>
-              <a:rPr sz="1100" b="0" i="0">
+              <a:rPr sz="1600" b="0" i="0">
                 <a:solidFill>
                   <a:srgbClr val="333333"/>
                 </a:solidFill>
@@ -6387,7 +7357,7 @@
           </a:fontRef>
         </p:style>
         <p:txBody>
-          <a:bodyPr rtlCol="0" anchor="ctr" lIns="182880"/>
+          <a:bodyPr lIns="182880" rtlCol="0" anchor="ctr"/>
           <a:lstStyle/>
           <a:p>
             <a:pPr algn="ctr"/>
@@ -6457,6 +7427,7 @@
           <a:lstStyle/>
           <a:p>
             <a:pPr algn="ctr"/>
+            <a:endParaRPr/>
           </a:p>
         </p:txBody>
       </p:sp>
@@ -6469,7 +7440,7 @@
         <p:spPr>
           <a:xfrm>
             <a:off x="8046719" y="2514600"/>
-            <a:ext cx="3337560" cy="3474720"/>
+            <a:ext cx="3337560" cy="2780248"/>
           </a:xfrm>
           <a:prstGeom prst="rect">
             <a:avLst/>
@@ -6488,7 +7459,7 @@
               </a:spcAft>
             </a:pPr>
             <a:r>
-              <a:rPr sz="1200" b="1" i="0">
+              <a:rPr b="1" i="0">
                 <a:solidFill>
                   <a:srgbClr val="CC0066"/>
                 </a:solidFill>
@@ -6504,7 +7475,7 @@
               </a:spcAft>
             </a:pPr>
             <a:r>
-              <a:rPr sz="1100" b="0" i="0">
+              <a:rPr sz="1600" b="0" i="0">
                 <a:solidFill>
                   <a:srgbClr val="333333"/>
                 </a:solidFill>
@@ -6520,7 +7491,7 @@
               </a:spcAft>
             </a:pPr>
             <a:r>
-              <a:rPr sz="1100" b="0" i="0">
+              <a:rPr sz="1600" b="0" i="0">
                 <a:solidFill>
                   <a:srgbClr val="333333"/>
                 </a:solidFill>
@@ -6535,14 +7506,43 @@
                 <a:spcPts val="400"/>
               </a:spcAft>
             </a:pPr>
-            <a:r>
-              <a:rPr sz="1100" b="0" i="0">
+            <a:endParaRPr sz="1600" b="0" i="0">
+              <a:solidFill>
+                <a:srgbClr val="333333"/>
+              </a:solidFill>
+              <a:latin typeface="Calibri"/>
+            </a:endParaRPr>
+          </a:p>
+          <a:p>
+            <a:pPr>
+              <a:spcAft>
+                <a:spcPts val="400"/>
+              </a:spcAft>
+            </a:pPr>
+            <a:r>
+              <a:rPr b="1" i="0">
+                <a:solidFill>
+                  <a:srgbClr val="CC0066"/>
+                </a:solidFill>
+                <a:latin typeface="Calibri"/>
+              </a:rPr>
+              <a:t>Use when:</a:t>
+            </a:r>
+          </a:p>
+          <a:p>
+            <a:pPr>
+              <a:spcAft>
+                <a:spcPts val="400"/>
+              </a:spcAft>
+            </a:pPr>
+            <a:r>
+              <a:rPr sz="1600" b="0" i="0">
                 <a:solidFill>
                   <a:srgbClr val="333333"/>
                 </a:solidFill>
                 <a:latin typeface="Calibri"/>
               </a:rPr>
-              <a:t/>
+              <a:t>SoC vendor only</a:t>
             </a:r>
           </a:p>
           <a:p>
@@ -6552,13 +7552,13 @@
               </a:spcAft>
             </a:pPr>
             <a:r>
-              <a:rPr sz="1200" b="1" i="0">
-                <a:solidFill>
-                  <a:srgbClr val="CC0066"/>
+              <a:rPr sz="1600" b="0" i="0">
+                <a:solidFill>
+                  <a:srgbClr val="333333"/>
                 </a:solidFill>
                 <a:latin typeface="Calibri"/>
               </a:rPr>
-              <a:t>Use when:</a:t>
+              <a:t>supports their fork,</a:t>
             </a:r>
           </a:p>
           <a:p>
@@ -6568,13 +7568,13 @@
               </a:spcAft>
             </a:pPr>
             <a:r>
-              <a:rPr sz="1100" b="0" i="0">
+              <a:rPr sz="1600" b="0" i="0">
                 <a:solidFill>
                   <a:srgbClr val="333333"/>
                 </a:solidFill>
                 <a:latin typeface="Calibri"/>
               </a:rPr>
-              <a:t>SoC vendor only</a:t>
+              <a:t>or you need their</a:t>
             </a:r>
           </a:p>
           <a:p>
@@ -6584,39 +7584,7 @@
               </a:spcAft>
             </a:pPr>
             <a:r>
-              <a:rPr sz="1100" b="0" i="0">
-                <a:solidFill>
-                  <a:srgbClr val="333333"/>
-                </a:solidFill>
-                <a:latin typeface="Calibri"/>
-              </a:rPr>
-              <a:t>supports their fork,</a:t>
-            </a:r>
-          </a:p>
-          <a:p>
-            <a:pPr>
-              <a:spcAft>
-                <a:spcPts val="400"/>
-              </a:spcAft>
-            </a:pPr>
-            <a:r>
-              <a:rPr sz="1100" b="0" i="0">
-                <a:solidFill>
-                  <a:srgbClr val="333333"/>
-                </a:solidFill>
-                <a:latin typeface="Calibri"/>
-              </a:rPr>
-              <a:t>or you need their</a:t>
-            </a:r>
-          </a:p>
-          <a:p>
-            <a:pPr>
-              <a:spcAft>
-                <a:spcPts val="400"/>
-              </a:spcAft>
-            </a:pPr>
-            <a:r>
-              <a:rPr sz="1100" b="0" i="0">
+              <a:rPr sz="1600" b="0" i="0">
                 <a:solidFill>
                   <a:srgbClr val="333333"/>
                 </a:solidFill>
@@ -6664,7 +7632,7 @@
           </a:fontRef>
         </p:style>
         <p:txBody>
-          <a:bodyPr rtlCol="0" anchor="ctr" lIns="228600" rIns="228600" wrap="square"/>
+          <a:bodyPr wrap="square" lIns="228600" rIns="228600" rtlCol="0" anchor="ctr"/>
           <a:lstStyle/>
           <a:p>
             <a:pPr algn="l"/>
@@ -6688,8 +7656,8 @@
 </p:sld>
 </file>
 
-<file path=ppt/slides/slide12.xml><?xml version="1.0" encoding="utf-8"?>
-<p:sld xmlns:a="http://schemas.openxmlformats.org/drawingml/2006/main" xmlns:p="http://schemas.openxmlformats.org/presentationml/2006/main" xmlns:r="http://schemas.openxmlformats.org/officeDocument/2006/relationships">
+<file path=ppt/slides/slide6.xml><?xml version="1.0" encoding="utf-8"?>
+<p:sld xmlns:a="http://schemas.openxmlformats.org/drawingml/2006/main" xmlns:r="http://schemas.openxmlformats.org/officeDocument/2006/relationships" xmlns:p="http://schemas.openxmlformats.org/presentationml/2006/main">
   <p:cSld>
     <p:spTree>
       <p:nvGrpSpPr>
@@ -6697,7 +7665,14 @@
         <p:cNvGrpSpPr/>
         <p:nvPr/>
       </p:nvGrpSpPr>
-      <p:grpSpPr/>
+      <p:grpSpPr>
+        <a:xfrm>
+          <a:off x="0" y="0"/>
+          <a:ext cx="0" cy="0"/>
+          <a:chOff x="0" y="0"/>
+          <a:chExt cx="0" cy="0"/>
+        </a:xfrm>
+      </p:grpSpPr>
       <p:sp>
         <p:nvSpPr>
           <p:cNvPr id="2" name="Title 1"/>
@@ -6714,10 +7689,7 @@
           <a:lstStyle/>
           <a:p>
             <a:r>
-              <a:rPr sz="3200" b="1">
-                <a:solidFill>
-                  <a:srgbClr val="CC0066"/>
-                </a:solidFill>
+              <a:rPr sz="3200" b="1" dirty="0">
                 <a:latin typeface="Calibri"/>
               </a:rPr>
               <a:t>Device Tree Workflow</a:t>
@@ -6742,7 +7714,7 @@
           <a:noFill/>
         </p:spPr>
         <p:txBody>
-          <a:bodyPr wrap="square" anchor="t" lIns="45720" rIns="45720">
+          <a:bodyPr wrap="square" lIns="45720" rIns="45720" anchor="t">
             <a:spAutoFit/>
           </a:bodyPr>
           <a:lstStyle/>
@@ -6803,6 +7775,7 @@
           <a:lstStyle/>
           <a:p>
             <a:pPr algn="ctr"/>
+            <a:endParaRPr/>
           </a:p>
         </p:txBody>
       </p:sp>
@@ -6847,6 +7820,7 @@
           <a:lstStyle/>
           <a:p>
             <a:pPr algn="ctr"/>
+            <a:endParaRPr/>
           </a:p>
         </p:txBody>
       </p:sp>
@@ -6858,8 +7832,8 @@
         </p:nvSpPr>
         <p:spPr>
           <a:xfrm>
-            <a:off x="1005840" y="1874519"/>
-            <a:ext cx="10241280" cy="4389120"/>
+            <a:off x="1197864" y="1806922"/>
+            <a:ext cx="10241280" cy="4524315"/>
           </a:xfrm>
           <a:prstGeom prst="rect">
             <a:avLst/>
@@ -6878,7 +7852,7 @@
               </a:spcAft>
             </a:pPr>
             <a:r>
-              <a:rPr sz="1100" i="1">
+              <a:rPr sz="1600" i="1">
                 <a:solidFill>
                   <a:srgbClr val="808080"/>
                 </a:solidFill>
@@ -6894,7 +7868,7 @@
               </a:spcAft>
             </a:pPr>
             <a:r>
-              <a:rPr sz="1100" i="1">
+              <a:rPr sz="1600" i="1">
                 <a:solidFill>
                   <a:srgbClr val="808080"/>
                 </a:solidFill>
@@ -6910,7 +7884,7 @@
               </a:spcAft>
             </a:pPr>
             <a:r>
-              <a:rPr sz="1100" i="1">
+              <a:rPr sz="1600" i="1">
                 <a:solidFill>
                   <a:srgbClr val="808080"/>
                 </a:solidFill>
@@ -6926,7 +7900,7 @@
               </a:spcAft>
             </a:pPr>
             <a:r>
-              <a:rPr sz="1100">
+              <a:rPr sz="1600">
                 <a:solidFill>
                   <a:srgbClr val="2D2D2D"/>
                 </a:solidFill>
@@ -6942,7 +7916,7 @@
               </a:spcAft>
             </a:pPr>
             <a:r>
-              <a:rPr sz="1100" i="1">
+              <a:rPr sz="1600" i="1">
                 <a:solidFill>
                   <a:srgbClr val="808080"/>
                 </a:solidFill>
@@ -6958,7 +7932,7 @@
               </a:spcAft>
             </a:pPr>
             <a:r>
-              <a:rPr sz="1100">
+              <a:rPr sz="1600">
                 <a:solidFill>
                   <a:srgbClr val="2D2D2D"/>
                 </a:solidFill>
@@ -6974,7 +7948,7 @@
               </a:spcAft>
             </a:pPr>
             <a:r>
-              <a:rPr sz="1100">
+              <a:rPr sz="1600">
                 <a:solidFill>
                   <a:srgbClr val="2D2D2D"/>
                 </a:solidFill>
@@ -6990,7 +7964,7 @@
               </a:spcAft>
             </a:pPr>
             <a:r>
-              <a:rPr sz="1100" i="1">
+              <a:rPr sz="1600" i="1">
                 <a:solidFill>
                   <a:srgbClr val="808080"/>
                 </a:solidFill>
@@ -7006,7 +7980,7 @@
               </a:spcAft>
             </a:pPr>
             <a:r>
-              <a:rPr sz="1100" i="1">
+              <a:rPr sz="1600" i="1">
                 <a:solidFill>
                   <a:srgbClr val="808080"/>
                 </a:solidFill>
@@ -7022,7 +7996,7 @@
               </a:spcAft>
             </a:pPr>
             <a:r>
-              <a:rPr sz="1100">
+              <a:rPr sz="1600">
                 <a:solidFill>
                   <a:srgbClr val="2D2D2D"/>
                 </a:solidFill>
@@ -7038,7 +8012,7 @@
               </a:spcAft>
             </a:pPr>
             <a:r>
-              <a:rPr sz="1100">
+              <a:rPr sz="1600">
                 <a:solidFill>
                   <a:srgbClr val="2D2D2D"/>
                 </a:solidFill>
@@ -7054,7 +8028,7 @@
               </a:spcAft>
             </a:pPr>
             <a:r>
-              <a:rPr sz="1100">
+              <a:rPr sz="1600">
                 <a:solidFill>
                   <a:srgbClr val="2D2D2D"/>
                 </a:solidFill>
@@ -7070,7 +8044,7 @@
               </a:spcAft>
             </a:pPr>
             <a:r>
-              <a:rPr sz="1100">
+              <a:rPr sz="1600">
                 <a:solidFill>
                   <a:srgbClr val="2D2D2D"/>
                 </a:solidFill>
@@ -7086,7 +8060,7 @@
               </a:spcAft>
             </a:pPr>
             <a:r>
-              <a:rPr sz="1100" i="1">
+              <a:rPr sz="1600" i="1">
                 <a:solidFill>
                   <a:srgbClr val="808080"/>
                 </a:solidFill>
@@ -7102,7 +8076,7 @@
               </a:spcAft>
             </a:pPr>
             <a:r>
-              <a:rPr sz="1100">
+              <a:rPr sz="1600">
                 <a:solidFill>
                   <a:srgbClr val="2D2D2D"/>
                 </a:solidFill>
@@ -7118,7 +8092,7 @@
               </a:spcAft>
             </a:pPr>
             <a:r>
-              <a:rPr sz="1100" i="1">
+              <a:rPr sz="1600" i="1">
                 <a:solidFill>
                   <a:srgbClr val="808080"/>
                 </a:solidFill>
@@ -7134,7 +8108,7 @@
               </a:spcAft>
             </a:pPr>
             <a:r>
-              <a:rPr sz="1100">
+              <a:rPr sz="1600">
                 <a:solidFill>
                   <a:srgbClr val="2D2D2D"/>
                 </a:solidFill>
@@ -7150,7 +8124,7 @@
               </a:spcAft>
             </a:pPr>
             <a:r>
-              <a:rPr sz="1100">
+              <a:rPr sz="1600">
                 <a:solidFill>
                   <a:srgbClr val="2D2D2D"/>
                 </a:solidFill>
@@ -7169,8 +8143,8 @@
 </p:sld>
 </file>
 
-<file path=ppt/slides/slide13.xml><?xml version="1.0" encoding="utf-8"?>
-<p:sld xmlns:a="http://schemas.openxmlformats.org/drawingml/2006/main" xmlns:p="http://schemas.openxmlformats.org/presentationml/2006/main" xmlns:r="http://schemas.openxmlformats.org/officeDocument/2006/relationships">
+<file path=ppt/slides/slide7.xml><?xml version="1.0" encoding="utf-8"?>
+<p:sld xmlns:a="http://schemas.openxmlformats.org/drawingml/2006/main" xmlns:r="http://schemas.openxmlformats.org/officeDocument/2006/relationships" xmlns:p="http://schemas.openxmlformats.org/presentationml/2006/main">
   <p:cSld>
     <p:spTree>
       <p:nvGrpSpPr>
@@ -7178,7 +8152,14 @@
         <p:cNvGrpSpPr/>
         <p:nvPr/>
       </p:nvGrpSpPr>
-      <p:grpSpPr/>
+      <p:grpSpPr>
+        <a:xfrm>
+          <a:off x="0" y="0"/>
+          <a:ext cx="0" cy="0"/>
+          <a:chOff x="0" y="0"/>
+          <a:chExt cx="0" cy="0"/>
+        </a:xfrm>
+      </p:grpSpPr>
       <p:sp>
         <p:nvSpPr>
           <p:cNvPr id="2" name="Title 1"/>
@@ -7195,10 +8176,7 @@
           <a:lstStyle/>
           <a:p>
             <a:r>
-              <a:rPr sz="3200" b="1">
-                <a:solidFill>
-                  <a:srgbClr val="CC0066"/>
-                </a:solidFill>
+              <a:rPr sz="3200" b="1" dirty="0">
                 <a:latin typeface="Calibri"/>
               </a:rPr>
               <a:t>Kernel Config Fragments</a:t>
@@ -7223,7 +8201,7 @@
           <a:noFill/>
         </p:spPr>
         <p:txBody>
-          <a:bodyPr wrap="square" anchor="t" lIns="45720" rIns="45720">
+          <a:bodyPr wrap="square" lIns="45720" rIns="45720" anchor="t">
             <a:spAutoFit/>
           </a:bodyPr>
           <a:lstStyle/>
@@ -7284,6 +8262,7 @@
           <a:lstStyle/>
           <a:p>
             <a:pPr algn="ctr"/>
+            <a:endParaRPr/>
           </a:p>
         </p:txBody>
       </p:sp>
@@ -7328,6 +8307,7 @@
           <a:lstStyle/>
           <a:p>
             <a:pPr algn="ctr"/>
+            <a:endParaRPr/>
           </a:p>
         </p:txBody>
       </p:sp>
@@ -7340,7 +8320,7 @@
         <p:spPr>
           <a:xfrm>
             <a:off x="1005840" y="1874519"/>
-            <a:ext cx="10241280" cy="4389120"/>
+            <a:ext cx="10241280" cy="4401205"/>
           </a:xfrm>
           <a:prstGeom prst="rect">
             <a:avLst/>
@@ -7359,7 +8339,7 @@
               </a:spcAft>
             </a:pPr>
             <a:r>
-              <a:rPr sz="1100" i="1">
+              <a:rPr sz="1400" i="1">
                 <a:solidFill>
                   <a:srgbClr val="808080"/>
                 </a:solidFill>
@@ -7375,7 +8355,7 @@
               </a:spcAft>
             </a:pPr>
             <a:r>
-              <a:rPr sz="1100" i="1">
+              <a:rPr sz="1400" i="1">
                 <a:solidFill>
                   <a:srgbClr val="808080"/>
                 </a:solidFill>
@@ -7391,7 +8371,7 @@
               </a:spcAft>
             </a:pPr>
             <a:r>
-              <a:rPr sz="1100" i="1">
+              <a:rPr sz="1400" i="1">
                 <a:solidFill>
                   <a:srgbClr val="808080"/>
                 </a:solidFill>
@@ -7407,7 +8387,7 @@
               </a:spcAft>
             </a:pPr>
             <a:r>
-              <a:rPr sz="1100" i="1">
+              <a:rPr sz="1400" i="1">
                 <a:solidFill>
                   <a:srgbClr val="808080"/>
                 </a:solidFill>
@@ -7423,7 +8403,7 @@
               </a:spcAft>
             </a:pPr>
             <a:r>
-              <a:rPr sz="1100">
+              <a:rPr sz="1400">
                 <a:solidFill>
                   <a:srgbClr val="2D2D2D"/>
                 </a:solidFill>
@@ -7439,7 +8419,7 @@
               </a:spcAft>
             </a:pPr>
             <a:r>
-              <a:rPr sz="1100" i="1">
+              <a:rPr sz="1400" i="1">
                 <a:solidFill>
                   <a:srgbClr val="808080"/>
                 </a:solidFill>
@@ -7455,7 +8435,7 @@
               </a:spcAft>
             </a:pPr>
             <a:r>
-              <a:rPr sz="1100">
+              <a:rPr sz="1400">
                 <a:solidFill>
                   <a:srgbClr val="2D2D2D"/>
                 </a:solidFill>
@@ -7471,7 +8451,7 @@
               </a:spcAft>
             </a:pPr>
             <a:r>
-              <a:rPr sz="1100">
+              <a:rPr sz="1400">
                 <a:solidFill>
                   <a:srgbClr val="2D2D2D"/>
                 </a:solidFill>
@@ -7487,7 +8467,7 @@
               </a:spcAft>
             </a:pPr>
             <a:r>
-              <a:rPr sz="1100">
+              <a:rPr sz="1400">
                 <a:solidFill>
                   <a:srgbClr val="2D2D2D"/>
                 </a:solidFill>
@@ -7503,7 +8483,7 @@
               </a:spcAft>
             </a:pPr>
             <a:r>
-              <a:rPr sz="1100">
+              <a:rPr sz="1400">
                 <a:solidFill>
                   <a:srgbClr val="2D2D2D"/>
                 </a:solidFill>
@@ -7519,7 +8499,7 @@
               </a:spcAft>
             </a:pPr>
             <a:r>
-              <a:rPr sz="1100">
+              <a:rPr sz="1400">
                 <a:solidFill>
                   <a:srgbClr val="2D2D2D"/>
                 </a:solidFill>
@@ -7535,7 +8515,7 @@
               </a:spcAft>
             </a:pPr>
             <a:r>
-              <a:rPr sz="1100" i="1">
+              <a:rPr sz="1400" i="1">
                 <a:solidFill>
                   <a:srgbClr val="808080"/>
                 </a:solidFill>
@@ -7551,7 +8531,7 @@
               </a:spcAft>
             </a:pPr>
             <a:r>
-              <a:rPr sz="1100" i="1">
+              <a:rPr sz="1400" i="1">
                 <a:solidFill>
                   <a:srgbClr val="808080"/>
                 </a:solidFill>
@@ -7567,7 +8547,7 @@
               </a:spcAft>
             </a:pPr>
             <a:r>
-              <a:rPr sz="1100">
+              <a:rPr sz="1400">
                 <a:solidFill>
                   <a:srgbClr val="2D2D2D"/>
                 </a:solidFill>
@@ -7583,7 +8563,7 @@
               </a:spcAft>
             </a:pPr>
             <a:r>
-              <a:rPr sz="1100">
+              <a:rPr sz="1400">
                 <a:solidFill>
                   <a:srgbClr val="2D2D2D"/>
                 </a:solidFill>
@@ -7599,7 +8579,7 @@
               </a:spcAft>
             </a:pPr>
             <a:r>
-              <a:rPr sz="1100">
+              <a:rPr sz="1400">
                 <a:solidFill>
                   <a:srgbClr val="2D2D2D"/>
                 </a:solidFill>
@@ -7615,7 +8595,7 @@
               </a:spcAft>
             </a:pPr>
             <a:r>
-              <a:rPr sz="1100">
+              <a:rPr sz="1400">
                 <a:solidFill>
                   <a:srgbClr val="2D2D2D"/>
                 </a:solidFill>
@@ -7631,7 +8611,7 @@
               </a:spcAft>
             </a:pPr>
             <a:r>
-              <a:rPr sz="1100" i="1">
+              <a:rPr sz="1400" i="1">
                 <a:solidFill>
                   <a:srgbClr val="808080"/>
                 </a:solidFill>
@@ -7647,7 +8627,7 @@
               </a:spcAft>
             </a:pPr>
             <a:r>
-              <a:rPr sz="1100" i="1">
+              <a:rPr sz="1400" i="1">
                 <a:solidFill>
                   <a:srgbClr val="808080"/>
                 </a:solidFill>
@@ -7663,7 +8643,7 @@
               </a:spcAft>
             </a:pPr>
             <a:r>
-              <a:rPr sz="1100" i="1">
+              <a:rPr sz="1400" i="1">
                 <a:solidFill>
                   <a:srgbClr val="808080"/>
                 </a:solidFill>
@@ -7682,8 +8662,8 @@
 </p:sld>
 </file>
 
-<file path=ppt/slides/slide14.xml><?xml version="1.0" encoding="utf-8"?>
-<p:sld xmlns:a="http://schemas.openxmlformats.org/drawingml/2006/main" xmlns:p="http://schemas.openxmlformats.org/presentationml/2006/main" xmlns:r="http://schemas.openxmlformats.org/officeDocument/2006/relationships">
+<file path=ppt/slides/slide8.xml><?xml version="1.0" encoding="utf-8"?>
+<p:sld xmlns:a="http://schemas.openxmlformats.org/drawingml/2006/main" xmlns:r="http://schemas.openxmlformats.org/officeDocument/2006/relationships" xmlns:p="http://schemas.openxmlformats.org/presentationml/2006/main">
   <p:cSld>
     <p:spTree>
       <p:nvGrpSpPr>
@@ -7691,7 +8671,14 @@
         <p:cNvGrpSpPr/>
         <p:nvPr/>
       </p:nvGrpSpPr>
-      <p:grpSpPr/>
+      <p:grpSpPr>
+        <a:xfrm>
+          <a:off x="0" y="0"/>
+          <a:ext cx="0" cy="0"/>
+          <a:chOff x="0" y="0"/>
+          <a:chExt cx="0" cy="0"/>
+        </a:xfrm>
+      </p:grpSpPr>
       <p:sp>
         <p:nvSpPr>
           <p:cNvPr id="2" name="Title 1"/>
@@ -7708,10 +8695,7 @@
           <a:lstStyle/>
           <a:p>
             <a:r>
-              <a:rPr sz="3200" b="1">
-                <a:solidFill>
-                  <a:srgbClr val="CC0066"/>
-                </a:solidFill>
+              <a:rPr sz="3200" b="1" dirty="0">
                 <a:latin typeface="Calibri"/>
               </a:rPr>
               <a:t>Building and Inspecting</a:t>
@@ -7736,7 +8720,7 @@
           <a:noFill/>
         </p:spPr>
         <p:txBody>
-          <a:bodyPr wrap="square" anchor="t" lIns="45720" rIns="45720">
+          <a:bodyPr wrap="square" lIns="45720" rIns="45720" anchor="t">
             <a:spAutoFit/>
           </a:bodyPr>
           <a:lstStyle/>
@@ -7797,6 +8781,7 @@
           <a:lstStyle/>
           <a:p>
             <a:pPr algn="ctr"/>
+            <a:endParaRPr/>
           </a:p>
         </p:txBody>
       </p:sp>
@@ -7841,6 +8826,7 @@
           <a:lstStyle/>
           <a:p>
             <a:pPr algn="ctr"/>
+            <a:endParaRPr/>
           </a:p>
         </p:txBody>
       </p:sp>
@@ -7853,7 +8839,7 @@
         <p:spPr>
           <a:xfrm>
             <a:off x="1005840" y="1874519"/>
-            <a:ext cx="10241280" cy="4389120"/>
+            <a:ext cx="10241280" cy="4401205"/>
           </a:xfrm>
           <a:prstGeom prst="rect">
             <a:avLst/>
@@ -7872,10 +8858,7 @@
               </a:spcAft>
             </a:pPr>
             <a:r>
-              <a:rPr sz="1100" i="1">
-                <a:solidFill>
-                  <a:srgbClr val="808080"/>
-                </a:solidFill>
+              <a:rPr sz="1400" i="1">
                 <a:latin typeface="Consolas"/>
               </a:rPr>
               <a:t># Build just the kernel</a:t>
@@ -7888,10 +8871,7 @@
               </a:spcAft>
             </a:pPr>
             <a:r>
-              <a:rPr sz="1100">
-                <a:solidFill>
-                  <a:srgbClr val="2D2D2D"/>
-                </a:solidFill>
+              <a:rPr sz="1400">
                 <a:latin typeface="Consolas"/>
               </a:rPr>
               <a:t>bitbake virtual/kernel</a:t>
@@ -7904,10 +8884,7 @@
               </a:spcAft>
             </a:pPr>
             <a:r>
-              <a:rPr sz="1100">
-                <a:solidFill>
-                  <a:srgbClr val="2D2D2D"/>
-                </a:solidFill>
+              <a:rPr sz="1400">
                 <a:latin typeface="Consolas"/>
               </a:rPr>
               <a:t> </a:t>
@@ -7920,10 +8897,7 @@
               </a:spcAft>
             </a:pPr>
             <a:r>
-              <a:rPr sz="1100" i="1">
-                <a:solidFill>
-                  <a:srgbClr val="808080"/>
-                </a:solidFill>
+              <a:rPr sz="1400" i="1">
                 <a:latin typeface="Consolas"/>
               </a:rPr>
               <a:t># Find the kernel deploy artifacts</a:t>
@@ -7936,10 +8910,7 @@
               </a:spcAft>
             </a:pPr>
             <a:r>
-              <a:rPr sz="1100">
-                <a:solidFill>
-                  <a:srgbClr val="2D2D2D"/>
-                </a:solidFill>
+              <a:rPr sz="1400">
                 <a:latin typeface="Consolas"/>
               </a:rPr>
               <a:t>ls tmp/deploy/images/${MACHINE}/ | grep -E '(Image|zImage|bzImage|dtb)'</a:t>
@@ -7952,10 +8923,7 @@
               </a:spcAft>
             </a:pPr>
             <a:r>
-              <a:rPr sz="1100">
-                <a:solidFill>
-                  <a:srgbClr val="2D2D2D"/>
-                </a:solidFill>
+              <a:rPr sz="1400">
                 <a:latin typeface="Consolas"/>
               </a:rPr>
               <a:t> </a:t>
@@ -7968,10 +8936,7 @@
               </a:spcAft>
             </a:pPr>
             <a:r>
-              <a:rPr sz="1100" i="1">
-                <a:solidFill>
-                  <a:srgbClr val="808080"/>
-                </a:solidFill>
+              <a:rPr sz="1400" i="1">
                 <a:latin typeface="Consolas"/>
               </a:rPr>
               <a:t># Drop into menuconfig (experimental — changes won't stick)</a:t>
@@ -7984,10 +8949,7 @@
               </a:spcAft>
             </a:pPr>
             <a:r>
-              <a:rPr sz="1100">
-                <a:solidFill>
-                  <a:srgbClr val="2D2D2D"/>
-                </a:solidFill>
+              <a:rPr sz="1400">
                 <a:latin typeface="Consolas"/>
               </a:rPr>
               <a:t>bitbake virtual/kernel -c menuconfig</a:t>
@@ -8000,10 +8962,7 @@
               </a:spcAft>
             </a:pPr>
             <a:r>
-              <a:rPr sz="1100">
-                <a:solidFill>
-                  <a:srgbClr val="2D2D2D"/>
-                </a:solidFill>
+              <a:rPr sz="1400">
                 <a:latin typeface="Consolas"/>
               </a:rPr>
               <a:t> </a:t>
@@ -8016,10 +8975,7 @@
               </a:spcAft>
             </a:pPr>
             <a:r>
-              <a:rPr sz="1100" i="1">
-                <a:solidFill>
-                  <a:srgbClr val="808080"/>
-                </a:solidFill>
+              <a:rPr sz="1400" i="1">
                 <a:latin typeface="Consolas"/>
               </a:rPr>
               <a:t># After menuconfig, save your edits as a fragment</a:t>
@@ -8032,10 +8988,7 @@
               </a:spcAft>
             </a:pPr>
             <a:r>
-              <a:rPr sz="1100">
-                <a:solidFill>
-                  <a:srgbClr val="2D2D2D"/>
-                </a:solidFill>
+              <a:rPr sz="1400">
                 <a:latin typeface="Consolas"/>
               </a:rPr>
               <a:t>bitbake virtual/kernel -c diffconfig</a:t>
@@ -8048,10 +9001,7 @@
               </a:spcAft>
             </a:pPr>
             <a:r>
-              <a:rPr sz="1100" i="1">
-                <a:solidFill>
-                  <a:srgbClr val="808080"/>
-                </a:solidFill>
+              <a:rPr sz="1400" i="1">
                 <a:latin typeface="Consolas"/>
               </a:rPr>
               <a:t># Look at fragment.cfg printed by the previous command</a:t>
@@ -8064,10 +9014,7 @@
               </a:spcAft>
             </a:pPr>
             <a:r>
-              <a:rPr sz="1100">
-                <a:solidFill>
-                  <a:srgbClr val="2D2D2D"/>
-                </a:solidFill>
+              <a:rPr sz="1400">
                 <a:latin typeface="Consolas"/>
               </a:rPr>
               <a:t> </a:t>
@@ -8080,10 +9027,7 @@
               </a:spcAft>
             </a:pPr>
             <a:r>
-              <a:rPr sz="1100" i="1">
-                <a:solidFill>
-                  <a:srgbClr val="808080"/>
-                </a:solidFill>
+              <a:rPr sz="1400" i="1">
                 <a:latin typeface="Consolas"/>
               </a:rPr>
               <a:t># Drop into a devshell for kernel source debugging</a:t>
@@ -8096,10 +9040,7 @@
               </a:spcAft>
             </a:pPr>
             <a:r>
-              <a:rPr sz="1100">
-                <a:solidFill>
-                  <a:srgbClr val="2D2D2D"/>
-                </a:solidFill>
+              <a:rPr sz="1400">
                 <a:latin typeface="Consolas"/>
               </a:rPr>
               <a:t>bitbake virtual/kernel -c devshell</a:t>
@@ -8112,10 +9053,7 @@
               </a:spcAft>
             </a:pPr>
             <a:r>
-              <a:rPr sz="1100" i="1">
-                <a:solidFill>
-                  <a:srgbClr val="808080"/>
-                </a:solidFill>
+              <a:rPr sz="1400" i="1">
                 <a:latin typeface="Consolas"/>
               </a:rPr>
               <a:t># Inside, you have the kernel source as if you were doing a make build</a:t>
@@ -8128,10 +9066,7 @@
               </a:spcAft>
             </a:pPr>
             <a:r>
-              <a:rPr sz="1100">
-                <a:solidFill>
-                  <a:srgbClr val="2D2D2D"/>
-                </a:solidFill>
+              <a:rPr sz="1400">
                 <a:latin typeface="Consolas"/>
               </a:rPr>
               <a:t> </a:t>
@@ -8144,10 +9079,7 @@
               </a:spcAft>
             </a:pPr>
             <a:r>
-              <a:rPr sz="1100" i="1">
-                <a:solidFill>
-                  <a:srgbClr val="808080"/>
-                </a:solidFill>
+              <a:rPr sz="1400" i="1">
                 <a:latin typeface="Consolas"/>
               </a:rPr>
               <a:t># Force a clean rebuild</a:t>
@@ -8160,10 +9092,7 @@
               </a:spcAft>
             </a:pPr>
             <a:r>
-              <a:rPr sz="1100">
-                <a:solidFill>
-                  <a:srgbClr val="2D2D2D"/>
-                </a:solidFill>
+              <a:rPr sz="1400">
                 <a:latin typeface="Consolas"/>
               </a:rPr>
               <a:t>bitbake virtual/kernel -c cleansstate</a:t>
@@ -8176,10 +9105,7 @@
               </a:spcAft>
             </a:pPr>
             <a:r>
-              <a:rPr sz="1100">
-                <a:solidFill>
-                  <a:srgbClr val="2D2D2D"/>
-                </a:solidFill>
+              <a:rPr sz="1400">
                 <a:latin typeface="Consolas"/>
               </a:rPr>
               <a:t>bitbake virtual/kernel</a:t>
@@ -8195,8 +9121,8 @@
 </p:sld>
 </file>
 
-<file path=ppt/slides/slide15.xml><?xml version="1.0" encoding="utf-8"?>
-<p:sld xmlns:a="http://schemas.openxmlformats.org/drawingml/2006/main" xmlns:p="http://schemas.openxmlformats.org/presentationml/2006/main" xmlns:r="http://schemas.openxmlformats.org/officeDocument/2006/relationships">
+<file path=ppt/slides/slide9.xml><?xml version="1.0" encoding="utf-8"?>
+<p:sld xmlns:a="http://schemas.openxmlformats.org/drawingml/2006/main" xmlns:r="http://schemas.openxmlformats.org/officeDocument/2006/relationships" xmlns:p="http://schemas.openxmlformats.org/presentationml/2006/main">
   <p:cSld>
     <p:spTree>
       <p:nvGrpSpPr>
@@ -8204,7 +9130,14 @@
         <p:cNvGrpSpPr/>
         <p:nvPr/>
       </p:nvGrpSpPr>
-      <p:grpSpPr/>
+      <p:grpSpPr>
+        <a:xfrm>
+          <a:off x="0" y="0"/>
+          <a:ext cx="0" cy="0"/>
+          <a:chOff x="0" y="0"/>
+          <a:chExt cx="0" cy="0"/>
+        </a:xfrm>
+      </p:grpSpPr>
       <p:sp>
         <p:nvSpPr>
           <p:cNvPr id="2" name="Title 1"/>
@@ -8221,10 +9154,7 @@
           <a:lstStyle/>
           <a:p>
             <a:r>
-              <a:rPr sz="3200" b="1">
-                <a:solidFill>
-                  <a:srgbClr val="663399"/>
-                </a:solidFill>
+              <a:rPr sz="3200" b="1" dirty="0">
                 <a:latin typeface="Calibri"/>
               </a:rPr>
               <a:t>Session Summary</a:t>
@@ -8249,7 +9179,7 @@
           <a:noFill/>
         </p:spPr>
         <p:txBody>
-          <a:bodyPr wrap="square" anchor="t" lIns="45720" rIns="45720">
+          <a:bodyPr wrap="square" lIns="45720" rIns="45720" anchor="t">
             <a:spAutoFit/>
           </a:bodyPr>
           <a:lstStyle/>
@@ -8304,7 +9234,7 @@
           </a:fontRef>
         </p:style>
         <p:txBody>
-          <a:bodyPr rtlCol="0" anchor="ctr" lIns="0" rIns="0"/>
+          <a:bodyPr lIns="0" rIns="0" rtlCol="0" anchor="ctr"/>
           <a:lstStyle/>
           <a:p>
             <a:pPr algn="ctr"/>
@@ -8337,7 +9267,7 @@
           <a:noFill/>
         </p:spPr>
         <p:txBody>
-          <a:bodyPr wrap="square" anchor="t" lIns="45720" rIns="45720">
+          <a:bodyPr wrap="square" lIns="45720" rIns="45720" anchor="t">
             <a:spAutoFit/>
           </a:bodyPr>
           <a:lstStyle/>
@@ -8372,7 +9302,7 @@
           <a:noFill/>
         </p:spPr>
         <p:txBody>
-          <a:bodyPr wrap="square" anchor="t" lIns="45720" rIns="45720">
+          <a:bodyPr wrap="square" lIns="45720" rIns="45720" anchor="t">
             <a:spAutoFit/>
           </a:bodyPr>
           <a:lstStyle/>
@@ -8427,7 +9357,7 @@
           </a:fontRef>
         </p:style>
         <p:txBody>
-          <a:bodyPr rtlCol="0" anchor="ctr" lIns="0" rIns="0"/>
+          <a:bodyPr lIns="0" rIns="0" rtlCol="0" anchor="ctr"/>
           <a:lstStyle/>
           <a:p>
             <a:pPr algn="ctr"/>
@@ -8460,7 +9390,7 @@
           <a:noFill/>
         </p:spPr>
         <p:txBody>
-          <a:bodyPr wrap="square" anchor="t" lIns="45720" rIns="45720">
+          <a:bodyPr wrap="square" lIns="45720" rIns="45720" anchor="t">
             <a:spAutoFit/>
           </a:bodyPr>
           <a:lstStyle/>
@@ -8495,7 +9425,7 @@
           <a:noFill/>
         </p:spPr>
         <p:txBody>
-          <a:bodyPr wrap="square" anchor="t" lIns="45720" rIns="45720">
+          <a:bodyPr wrap="square" lIns="45720" rIns="45720" anchor="t">
             <a:spAutoFit/>
           </a:bodyPr>
           <a:lstStyle/>
@@ -8550,7 +9480,7 @@
           </a:fontRef>
         </p:style>
         <p:txBody>
-          <a:bodyPr rtlCol="0" anchor="ctr" lIns="0" rIns="0"/>
+          <a:bodyPr lIns="0" rIns="0" rtlCol="0" anchor="ctr"/>
           <a:lstStyle/>
           <a:p>
             <a:pPr algn="ctr"/>
@@ -8583,7 +9513,7 @@
           <a:noFill/>
         </p:spPr>
         <p:txBody>
-          <a:bodyPr wrap="square" anchor="t" lIns="45720" rIns="45720">
+          <a:bodyPr wrap="square" lIns="45720" rIns="45720" anchor="t">
             <a:spAutoFit/>
           </a:bodyPr>
           <a:lstStyle/>
@@ -8618,7 +9548,7 @@
           <a:noFill/>
         </p:spPr>
         <p:txBody>
-          <a:bodyPr wrap="square" anchor="t" lIns="45720" rIns="45720">
+          <a:bodyPr wrap="square" lIns="45720" rIns="45720" anchor="t">
             <a:spAutoFit/>
           </a:bodyPr>
           <a:lstStyle/>
@@ -8673,7 +9603,7 @@
           </a:fontRef>
         </p:style>
         <p:txBody>
-          <a:bodyPr rtlCol="0" anchor="ctr" lIns="0" rIns="0"/>
+          <a:bodyPr lIns="0" rIns="0" rtlCol="0" anchor="ctr"/>
           <a:lstStyle/>
           <a:p>
             <a:pPr algn="ctr"/>
@@ -8706,7 +9636,7 @@
           <a:noFill/>
         </p:spPr>
         <p:txBody>
-          <a:bodyPr wrap="square" anchor="t" lIns="45720" rIns="45720">
+          <a:bodyPr wrap="square" lIns="45720" rIns="45720" anchor="t">
             <a:spAutoFit/>
           </a:bodyPr>
           <a:lstStyle/>
@@ -8741,7 +9671,7 @@
           <a:noFill/>
         </p:spPr>
         <p:txBody>
-          <a:bodyPr wrap="square" anchor="t" lIns="45720" rIns="45720">
+          <a:bodyPr wrap="square" lIns="45720" rIns="45720" anchor="t">
             <a:spAutoFit/>
           </a:bodyPr>
           <a:lstStyle/>
@@ -8796,7 +9726,7 @@
           </a:fontRef>
         </p:style>
         <p:txBody>
-          <a:bodyPr rtlCol="0" anchor="ctr" lIns="0" rIns="0"/>
+          <a:bodyPr lIns="0" rIns="0" rtlCol="0" anchor="ctr"/>
           <a:lstStyle/>
           <a:p>
             <a:pPr algn="ctr"/>
@@ -8829,7 +9759,7 @@
           <a:noFill/>
         </p:spPr>
         <p:txBody>
-          <a:bodyPr wrap="square" anchor="t" lIns="45720" rIns="45720">
+          <a:bodyPr wrap="square" lIns="45720" rIns="45720" anchor="t">
             <a:spAutoFit/>
           </a:bodyPr>
           <a:lstStyle/>
@@ -8864,7 +9794,7 @@
           <a:noFill/>
         </p:spPr>
         <p:txBody>
-          <a:bodyPr wrap="square" anchor="t" lIns="45720" rIns="45720">
+          <a:bodyPr wrap="square" lIns="45720" rIns="45720" anchor="t">
             <a:spAutoFit/>
           </a:bodyPr>
           <a:lstStyle/>
@@ -8919,12 +9849,12 @@
           </a:fontRef>
         </p:style>
         <p:txBody>
-          <a:bodyPr rtlCol="0" anchor="ctr" lIns="228600"/>
+          <a:bodyPr lIns="228600" rtlCol="0" anchor="ctr"/>
           <a:lstStyle/>
           <a:p>
             <a:pPr algn="ctr"/>
             <a:r>
-              <a:rPr sz="1400" b="1">
+              <a:rPr sz="1400" b="1" dirty="0">
                 <a:solidFill>
                   <a:srgbClr val="663399"/>
                 </a:solidFill>
@@ -8933,953 +9863,31 @@
               <a:t>Next session  →  </a:t>
             </a:r>
             <a:r>
-              <a:rPr sz="1400">
+              <a:rPr sz="1400" dirty="0">
                 <a:solidFill>
                   <a:srgbClr val="333333"/>
                 </a:solidFill>
                 <a:latin typeface="Calibri"/>
               </a:rPr>
-              <a:t>Build Debugging (60 min) — diagnosing failures fast</a:t>
-            </a:r>
-          </a:p>
-        </p:txBody>
-      </p:sp>
-    </p:spTree>
-  </p:cSld>
-  <p:clrMapOvr>
-    <a:masterClrMapping/>
-  </p:clrMapOvr>
-</p:sld>
-</file>
-
-<file path=ppt/slides/slide7.xml><?xml version="1.0" encoding="utf-8"?>
-<p:sld xmlns:a="http://schemas.openxmlformats.org/drawingml/2006/main" xmlns:p="http://schemas.openxmlformats.org/presentationml/2006/main" xmlns:r="http://schemas.openxmlformats.org/officeDocument/2006/relationships">
-  <p:cSld>
-    <p:spTree>
-      <p:nvGrpSpPr>
-        <p:cNvPr id="1" name=""/>
-        <p:cNvGrpSpPr/>
-        <p:nvPr/>
-      </p:nvGrpSpPr>
-      <p:grpSpPr/>
-      <p:sp>
-        <p:nvSpPr>
-          <p:cNvPr id="2" name="Title 1"/>
-          <p:cNvSpPr>
-            <a:spLocks noGrp="1"/>
-          </p:cNvSpPr>
-          <p:nvPr>
-            <p:ph type="ctrTitle"/>
-          </p:nvPr>
-        </p:nvSpPr>
-        <p:spPr/>
-        <p:txBody>
-          <a:bodyPr/>
-          <a:lstStyle/>
-          <a:p>
-            <a:r>
-              <a:rPr sz="4400" b="1">
-                <a:solidFill>
-                  <a:srgbClr val="FFFFFF"/>
+              <a:t>Build Debugging </a:t>
+            </a:r>
+            <a:r>
+              <a:rPr lang="en-IN" sz="1400" dirty="0">
+                <a:solidFill>
+                  <a:srgbClr val="333333"/>
                 </a:solidFill>
                 <a:latin typeface="Calibri"/>
               </a:rPr>
-              <a:t>BSP and Kernel Integration</a:t>
-            </a:r>
-          </a:p>
-        </p:txBody>
-      </p:sp>
-      <p:sp>
-        <p:nvSpPr>
-          <p:cNvPr id="3" name="Subtitle 2"/>
-          <p:cNvSpPr>
-            <a:spLocks noGrp="1"/>
-          </p:cNvSpPr>
-          <p:nvPr>
-            <p:ph type="subTitle" idx="1"/>
-          </p:nvPr>
-        </p:nvSpPr>
-        <p:spPr/>
-        <p:txBody>
-          <a:bodyPr/>
-          <a:lstStyle/>
-          <a:p>
-            <a:r>
-              <a:rPr sz="2200" i="1">
-                <a:solidFill>
-                  <a:srgbClr val="FFFFFF"/>
+              <a:t>:</a:t>
+            </a:r>
+            <a:r>
+              <a:rPr sz="1400" dirty="0">
+                <a:solidFill>
+                  <a:srgbClr val="333333"/>
                 </a:solidFill>
                 <a:latin typeface="Calibri"/>
               </a:rPr>
-              <a:t>Day 2 • Session 4 • 75 minutes</a:t>
-            </a:r>
-          </a:p>
-          <a:p>
-            <a:r>
-              <a:rPr sz="1800">
-                <a:solidFill>
-                  <a:srgbClr val="FFFFFF"/>
-                </a:solidFill>
-                <a:latin typeface="Calibri"/>
-              </a:rPr>
-              <a:t>Hardware enablement, kernel recipes, device tree, config fragments</a:t>
-            </a:r>
-          </a:p>
-        </p:txBody>
-      </p:sp>
-    </p:spTree>
-  </p:cSld>
-  <p:clrMapOvr>
-    <a:masterClrMapping/>
-  </p:clrMapOvr>
-</p:sld>
-</file>
-
-<file path=ppt/slides/slide8.xml><?xml version="1.0" encoding="utf-8"?>
-<p:sld xmlns:a="http://schemas.openxmlformats.org/drawingml/2006/main" xmlns:p="http://schemas.openxmlformats.org/presentationml/2006/main" xmlns:r="http://schemas.openxmlformats.org/officeDocument/2006/relationships">
-  <p:cSld>
-    <p:spTree>
-      <p:nvGrpSpPr>
-        <p:cNvPr id="1" name=""/>
-        <p:cNvGrpSpPr/>
-        <p:nvPr/>
-      </p:nvGrpSpPr>
-      <p:grpSpPr/>
-      <p:sp>
-        <p:nvSpPr>
-          <p:cNvPr id="2" name="Title 1"/>
-          <p:cNvSpPr>
-            <a:spLocks noGrp="1"/>
-          </p:cNvSpPr>
-          <p:nvPr>
-            <p:ph type="title"/>
-          </p:nvPr>
-        </p:nvSpPr>
-        <p:spPr/>
-        <p:txBody>
-          <a:bodyPr/>
-          <a:lstStyle/>
-          <a:p>
-            <a:r>
-              <a:rPr sz="3200" b="1">
-                <a:solidFill>
-                  <a:srgbClr val="CC0066"/>
-                </a:solidFill>
-                <a:latin typeface="Calibri"/>
-              </a:rPr>
-              <a:t>Session Agenda</a:t>
-            </a:r>
-          </a:p>
-        </p:txBody>
-      </p:sp>
-      <p:sp>
-        <p:nvSpPr>
-          <p:cNvPr id="3" name="TextBox 2"/>
-          <p:cNvSpPr txBox="1"/>
-          <p:nvPr/>
-        </p:nvSpPr>
-        <p:spPr>
-          <a:xfrm>
-            <a:off x="822960" y="1463040"/>
-            <a:ext cx="10515600" cy="5029200"/>
-          </a:xfrm>
-          <a:prstGeom prst="rect">
-            <a:avLst/>
-          </a:prstGeom>
-          <a:noFill/>
-        </p:spPr>
-        <p:txBody>
-          <a:bodyPr wrap="square" lIns="45720" rIns="45720">
-            <a:spAutoFit/>
-          </a:bodyPr>
-          <a:lstStyle/>
-          <a:p>
-            <a:pPr>
-              <a:spcAft>
-                <a:spcPts val="600"/>
-              </a:spcAft>
-            </a:pPr>
-            <a:r>
-              <a:rPr sz="2000" b="0" i="0">
-                <a:solidFill>
-                  <a:srgbClr val="333333"/>
-                </a:solidFill>
-                <a:latin typeface="Calibri"/>
-              </a:rPr>
-              <a:t>1.  BSP layer structure — meta-bsp vs meta-product</a:t>
-            </a:r>
-          </a:p>
-          <a:p>
-            <a:pPr>
-              <a:spcAft>
-                <a:spcPts val="600"/>
-              </a:spcAft>
-            </a:pPr>
-            <a:r>
-              <a:rPr sz="2000" b="0" i="0">
-                <a:solidFill>
-                  <a:srgbClr val="333333"/>
-                </a:solidFill>
-                <a:latin typeface="Calibri"/>
-              </a:rPr>
-              <a:t>2.  MACHINE tuning — CPU features, boot args, storage</a:t>
-            </a:r>
-          </a:p>
-          <a:p>
-            <a:pPr>
-              <a:spcAft>
-                <a:spcPts val="600"/>
-              </a:spcAft>
-            </a:pPr>
-            <a:r>
-              <a:rPr sz="2000" b="0" i="0">
-                <a:solidFill>
-                  <a:srgbClr val="333333"/>
-                </a:solidFill>
-                <a:latin typeface="Calibri"/>
-              </a:rPr>
-              <a:t>3.  Kernel recipe strategy — vendor fork vs mainline</a:t>
-            </a:r>
-          </a:p>
-          <a:p>
-            <a:pPr>
-              <a:spcAft>
-                <a:spcPts val="600"/>
-              </a:spcAft>
-            </a:pPr>
-            <a:r>
-              <a:rPr sz="2000" b="0" i="0">
-                <a:solidFill>
-                  <a:srgbClr val="333333"/>
-                </a:solidFill>
-                <a:latin typeface="Calibri"/>
-              </a:rPr>
-              <a:t>4.  Device tree workflow</a:t>
-            </a:r>
-          </a:p>
-          <a:p>
-            <a:pPr>
-              <a:spcAft>
-                <a:spcPts val="600"/>
-              </a:spcAft>
-            </a:pPr>
-            <a:r>
-              <a:rPr sz="2000" b="0" i="0">
-                <a:solidFill>
-                  <a:srgbClr val="333333"/>
-                </a:solidFill>
-                <a:latin typeface="Calibri"/>
-              </a:rPr>
-              <a:t>5.  Kernel configuration fragments</a:t>
-            </a:r>
-          </a:p>
-          <a:p>
-            <a:pPr>
-              <a:spcAft>
-                <a:spcPts val="600"/>
-              </a:spcAft>
-            </a:pPr>
-            <a:r>
-              <a:rPr sz="2000" b="0" i="0">
-                <a:solidFill>
-                  <a:srgbClr val="333333"/>
-                </a:solidFill>
-                <a:latin typeface="Calibri"/>
-              </a:rPr>
-              <a:t>6.  Building and inspecting the kernel</a:t>
-            </a:r>
-          </a:p>
-        </p:txBody>
-      </p:sp>
-    </p:spTree>
-  </p:cSld>
-  <p:clrMapOvr>
-    <a:masterClrMapping/>
-  </p:clrMapOvr>
-</p:sld>
-</file>
-
-<file path=ppt/slides/slide9.xml><?xml version="1.0" encoding="utf-8"?>
-<p:sld xmlns:a="http://schemas.openxmlformats.org/drawingml/2006/main" xmlns:p="http://schemas.openxmlformats.org/presentationml/2006/main" xmlns:r="http://schemas.openxmlformats.org/officeDocument/2006/relationships">
-  <p:cSld>
-    <p:spTree>
-      <p:nvGrpSpPr>
-        <p:cNvPr id="1" name=""/>
-        <p:cNvGrpSpPr/>
-        <p:nvPr/>
-      </p:nvGrpSpPr>
-      <p:grpSpPr/>
-      <p:sp>
-        <p:nvSpPr>
-          <p:cNvPr id="2" name="Title 1"/>
-          <p:cNvSpPr>
-            <a:spLocks noGrp="1"/>
-          </p:cNvSpPr>
-          <p:nvPr>
-            <p:ph type="title"/>
-          </p:nvPr>
-        </p:nvSpPr>
-        <p:spPr/>
-        <p:txBody>
-          <a:bodyPr/>
-          <a:lstStyle/>
-          <a:p>
-            <a:r>
-              <a:rPr sz="3200" b="1">
-                <a:solidFill>
-                  <a:srgbClr val="CC0066"/>
-                </a:solidFill>
-                <a:latin typeface="Calibri"/>
-              </a:rPr>
-              <a:t>BSP Layer Design</a:t>
-            </a:r>
-          </a:p>
-        </p:txBody>
-      </p:sp>
-      <p:sp>
-        <p:nvSpPr>
-          <p:cNvPr id="3" name="TextBox 2"/>
-          <p:cNvSpPr txBox="1"/>
-          <p:nvPr/>
-        </p:nvSpPr>
-        <p:spPr>
-          <a:xfrm>
-            <a:off x="822960" y="1417320"/>
-            <a:ext cx="10515600" cy="365760"/>
-          </a:xfrm>
-          <a:prstGeom prst="rect">
-            <a:avLst/>
-          </a:prstGeom>
-          <a:noFill/>
-        </p:spPr>
-        <p:txBody>
-          <a:bodyPr wrap="square" anchor="t" lIns="45720" rIns="45720">
-            <a:spAutoFit/>
-          </a:bodyPr>
-          <a:lstStyle/>
-          <a:p>
-            <a:pPr algn="l"/>
-            <a:r>
-              <a:rPr sz="1500" b="0" i="1">
-                <a:solidFill>
-                  <a:srgbClr val="666666"/>
-                </a:solidFill>
-                <a:latin typeface="Calibri"/>
-              </a:rPr>
-              <a:t>Split hardware-specific stuff from product-specific stuff.</a:t>
-            </a:r>
-          </a:p>
-        </p:txBody>
-      </p:sp>
-      <p:sp>
-        <p:nvSpPr>
-          <p:cNvPr id="4" name="Rounded Rectangle 3"/>
-          <p:cNvSpPr/>
-          <p:nvPr/>
-        </p:nvSpPr>
-        <p:spPr>
-          <a:xfrm>
-            <a:off x="822960" y="1783080"/>
-            <a:ext cx="5120640" cy="4297680"/>
-          </a:xfrm>
-          <a:prstGeom prst="roundRect">
-            <a:avLst/>
-          </a:prstGeom>
-          <a:solidFill>
-            <a:srgbClr val="FCE4EC"/>
-          </a:solidFill>
-          <a:ln w="6350">
-            <a:solidFill>
-              <a:srgbClr val="CC0066"/>
-            </a:solidFill>
-          </a:ln>
-          <a:effectLst/>
-        </p:spPr>
-        <p:style>
-          <a:lnRef idx="1">
-            <a:schemeClr val="accent1"/>
-          </a:lnRef>
-          <a:fillRef idx="3">
-            <a:schemeClr val="accent1"/>
-          </a:fillRef>
-          <a:effectRef idx="2">
-            <a:schemeClr val="accent1"/>
-          </a:effectRef>
-          <a:fontRef idx="minor">
-            <a:schemeClr val="lt1"/>
-          </a:fontRef>
-        </p:style>
-        <p:txBody>
-          <a:bodyPr rtlCol="0" anchor="ctr"/>
-          <a:lstStyle/>
-          <a:p>
-            <a:pPr algn="ctr"/>
-          </a:p>
-        </p:txBody>
-      </p:sp>
-      <p:sp>
-        <p:nvSpPr>
-          <p:cNvPr id="5" name="TextBox 4"/>
-          <p:cNvSpPr txBox="1"/>
-          <p:nvPr/>
-        </p:nvSpPr>
-        <p:spPr>
-          <a:xfrm>
-            <a:off x="960120" y="1920240"/>
-            <a:ext cx="4937760" cy="457200"/>
-          </a:xfrm>
-          <a:prstGeom prst="rect">
-            <a:avLst/>
-          </a:prstGeom>
-          <a:noFill/>
-        </p:spPr>
-        <p:txBody>
-          <a:bodyPr wrap="square" anchor="t" lIns="45720" rIns="45720">
-            <a:spAutoFit/>
-          </a:bodyPr>
-          <a:lstStyle/>
-          <a:p>
-            <a:pPr algn="l"/>
-            <a:r>
-              <a:rPr sz="1800" b="1" i="0">
-                <a:solidFill>
-                  <a:srgbClr val="CC0066"/>
-                </a:solidFill>
-                <a:latin typeface="Calibri"/>
-              </a:rPr>
-              <a:t>meta-yourbsp</a:t>
-            </a:r>
-          </a:p>
-        </p:txBody>
-      </p:sp>
-      <p:sp>
-        <p:nvSpPr>
-          <p:cNvPr id="6" name="TextBox 5"/>
-          <p:cNvSpPr txBox="1"/>
-          <p:nvPr/>
-        </p:nvSpPr>
-        <p:spPr>
-          <a:xfrm>
-            <a:off x="960120" y="2468880"/>
-            <a:ext cx="4937760" cy="3520440"/>
-          </a:xfrm>
-          <a:prstGeom prst="rect">
-            <a:avLst/>
-          </a:prstGeom>
-          <a:noFill/>
-        </p:spPr>
-        <p:txBody>
-          <a:bodyPr wrap="square" lIns="45720" rIns="45720">
-            <a:spAutoFit/>
-          </a:bodyPr>
-          <a:lstStyle/>
-          <a:p>
-            <a:pPr>
-              <a:spcAft>
-                <a:spcPts val="400"/>
-              </a:spcAft>
-            </a:pPr>
-            <a:r>
-              <a:rPr sz="1300" b="1" i="0">
-                <a:solidFill>
-                  <a:srgbClr val="CC0066"/>
-                </a:solidFill>
-                <a:latin typeface="Calibri"/>
-              </a:rPr>
-              <a:t>Purpose</a:t>
-            </a:r>
-          </a:p>
-          <a:p>
-            <a:pPr>
-              <a:spcAft>
-                <a:spcPts val="800"/>
-              </a:spcAft>
-            </a:pPr>
-            <a:r>
-              <a:rPr sz="1200" b="0" i="0">
-                <a:solidFill>
-                  <a:srgbClr val="333333"/>
-                </a:solidFill>
-                <a:latin typeface="Calibri"/>
-              </a:rPr>
-              <a:t>Enable the hardware. Nothing else.</a:t>
-            </a:r>
-          </a:p>
-          <a:p>
-            <a:pPr>
-              <a:spcAft>
-                <a:spcPts val="400"/>
-              </a:spcAft>
-            </a:pPr>
-            <a:r>
-              <a:rPr sz="1300" b="1" i="0">
-                <a:solidFill>
-                  <a:srgbClr val="CC0066"/>
-                </a:solidFill>
-                <a:latin typeface="Calibri"/>
-              </a:rPr>
-              <a:t>Contents</a:t>
-            </a:r>
-          </a:p>
-          <a:p>
-            <a:pPr>
-              <a:spcAft>
-                <a:spcPts val="400"/>
-              </a:spcAft>
-            </a:pPr>
-            <a:r>
-              <a:rPr sz="1200" b="0" i="0">
-                <a:solidFill>
-                  <a:srgbClr val="333333"/>
-                </a:solidFill>
-                <a:latin typeface="Calibri"/>
-              </a:rPr>
-              <a:t>• MACHINE config files</a:t>
-            </a:r>
-          </a:p>
-          <a:p>
-            <a:pPr>
-              <a:spcAft>
-                <a:spcPts val="400"/>
-              </a:spcAft>
-            </a:pPr>
-            <a:r>
-              <a:rPr sz="1200" b="0" i="0">
-                <a:solidFill>
-                  <a:srgbClr val="333333"/>
-                </a:solidFill>
-                <a:latin typeface="Calibri"/>
-              </a:rPr>
-              <a:t>• Kernel recipe / bbappend</a:t>
-            </a:r>
-          </a:p>
-          <a:p>
-            <a:pPr>
-              <a:spcAft>
-                <a:spcPts val="400"/>
-              </a:spcAft>
-            </a:pPr>
-            <a:r>
-              <a:rPr sz="1200" b="0" i="0">
-                <a:solidFill>
-                  <a:srgbClr val="333333"/>
-                </a:solidFill>
-                <a:latin typeface="Calibri"/>
-              </a:rPr>
-              <a:t>• Bootloader recipe</a:t>
-            </a:r>
-          </a:p>
-          <a:p>
-            <a:pPr>
-              <a:spcAft>
-                <a:spcPts val="400"/>
-              </a:spcAft>
-            </a:pPr>
-            <a:r>
-              <a:rPr sz="1200" b="0" i="0">
-                <a:solidFill>
-                  <a:srgbClr val="333333"/>
-                </a:solidFill>
-                <a:latin typeface="Calibri"/>
-              </a:rPr>
-              <a:t>• Device tree sources</a:t>
-            </a:r>
-          </a:p>
-          <a:p>
-            <a:pPr>
-              <a:spcAft>
-                <a:spcPts val="400"/>
-              </a:spcAft>
-            </a:pPr>
-            <a:r>
-              <a:rPr sz="1200" b="0" i="0">
-                <a:solidFill>
-                  <a:srgbClr val="333333"/>
-                </a:solidFill>
-                <a:latin typeface="Calibri"/>
-              </a:rPr>
-              <a:t>• Firmware blobs</a:t>
-            </a:r>
-          </a:p>
-          <a:p>
-            <a:pPr>
-              <a:spcAft>
-                <a:spcPts val="800"/>
-              </a:spcAft>
-            </a:pPr>
-            <a:r>
-              <a:rPr sz="1200" b="0" i="0">
-                <a:solidFill>
-                  <a:srgbClr val="333333"/>
-                </a:solidFill>
-                <a:latin typeface="Calibri"/>
-              </a:rPr>
-              <a:t>• Hardware-specific drivers</a:t>
-            </a:r>
-          </a:p>
-          <a:p>
-            <a:pPr>
-              <a:spcAft>
-                <a:spcPts val="400"/>
-              </a:spcAft>
-            </a:pPr>
-            <a:r>
-              <a:rPr sz="1300" b="1" i="0">
-                <a:solidFill>
-                  <a:srgbClr val="CC0066"/>
-                </a:solidFill>
-                <a:latin typeface="Calibri"/>
-              </a:rPr>
-              <a:t>Reused</a:t>
-            </a:r>
-          </a:p>
-          <a:p>
-            <a:pPr>
-              <a:spcAft>
-                <a:spcPts val="400"/>
-              </a:spcAft>
-            </a:pPr>
-            <a:r>
-              <a:rPr sz="1200" b="0" i="1">
-                <a:solidFill>
-                  <a:srgbClr val="333333"/>
-                </a:solidFill>
-                <a:latin typeface="Calibri"/>
-              </a:rPr>
-              <a:t>Across all products on this hardware</a:t>
-            </a:r>
-          </a:p>
-        </p:txBody>
-      </p:sp>
-      <p:sp>
-        <p:nvSpPr>
-          <p:cNvPr id="7" name="Rounded Rectangle 6"/>
-          <p:cNvSpPr/>
-          <p:nvPr/>
-        </p:nvSpPr>
-        <p:spPr>
-          <a:xfrm>
-            <a:off x="6263640" y="1783080"/>
-            <a:ext cx="5120640" cy="4297680"/>
-          </a:xfrm>
-          <a:prstGeom prst="roundRect">
-            <a:avLst/>
-          </a:prstGeom>
-          <a:solidFill>
-            <a:srgbClr val="E9D8F0"/>
-          </a:solidFill>
-          <a:ln w="6350">
-            <a:solidFill>
-              <a:srgbClr val="663399"/>
-            </a:solidFill>
-          </a:ln>
-          <a:effectLst/>
-        </p:spPr>
-        <p:style>
-          <a:lnRef idx="1">
-            <a:schemeClr val="accent1"/>
-          </a:lnRef>
-          <a:fillRef idx="3">
-            <a:schemeClr val="accent1"/>
-          </a:fillRef>
-          <a:effectRef idx="2">
-            <a:schemeClr val="accent1"/>
-          </a:effectRef>
-          <a:fontRef idx="minor">
-            <a:schemeClr val="lt1"/>
-          </a:fontRef>
-        </p:style>
-        <p:txBody>
-          <a:bodyPr rtlCol="0" anchor="ctr"/>
-          <a:lstStyle/>
-          <a:p>
-            <a:pPr algn="ctr"/>
-          </a:p>
-        </p:txBody>
-      </p:sp>
-      <p:sp>
-        <p:nvSpPr>
-          <p:cNvPr id="8" name="TextBox 7"/>
-          <p:cNvSpPr txBox="1"/>
-          <p:nvPr/>
-        </p:nvSpPr>
-        <p:spPr>
-          <a:xfrm>
-            <a:off x="6400800" y="1920240"/>
-            <a:ext cx="4937760" cy="457200"/>
-          </a:xfrm>
-          <a:prstGeom prst="rect">
-            <a:avLst/>
-          </a:prstGeom>
-          <a:noFill/>
-        </p:spPr>
-        <p:txBody>
-          <a:bodyPr wrap="square" anchor="t" lIns="45720" rIns="45720">
-            <a:spAutoFit/>
-          </a:bodyPr>
-          <a:lstStyle/>
-          <a:p>
-            <a:pPr algn="l"/>
-            <a:r>
-              <a:rPr sz="1800" b="1" i="0">
-                <a:solidFill>
-                  <a:srgbClr val="663399"/>
-                </a:solidFill>
-                <a:latin typeface="Calibri"/>
-              </a:rPr>
-              <a:t>meta-yourproduct</a:t>
-            </a:r>
-          </a:p>
-        </p:txBody>
-      </p:sp>
-      <p:sp>
-        <p:nvSpPr>
-          <p:cNvPr id="9" name="TextBox 8"/>
-          <p:cNvSpPr txBox="1"/>
-          <p:nvPr/>
-        </p:nvSpPr>
-        <p:spPr>
-          <a:xfrm>
-            <a:off x="6400800" y="2468880"/>
-            <a:ext cx="4937760" cy="3520440"/>
-          </a:xfrm>
-          <a:prstGeom prst="rect">
-            <a:avLst/>
-          </a:prstGeom>
-          <a:noFill/>
-        </p:spPr>
-        <p:txBody>
-          <a:bodyPr wrap="square" lIns="45720" rIns="45720">
-            <a:spAutoFit/>
-          </a:bodyPr>
-          <a:lstStyle/>
-          <a:p>
-            <a:pPr>
-              <a:spcAft>
-                <a:spcPts val="400"/>
-              </a:spcAft>
-            </a:pPr>
-            <a:r>
-              <a:rPr sz="1300" b="1" i="0">
-                <a:solidFill>
-                  <a:srgbClr val="663399"/>
-                </a:solidFill>
-                <a:latin typeface="Calibri"/>
-              </a:rPr>
-              <a:t>Purpose</a:t>
-            </a:r>
-          </a:p>
-          <a:p>
-            <a:pPr>
-              <a:spcAft>
-                <a:spcPts val="800"/>
-              </a:spcAft>
-            </a:pPr>
-            <a:r>
-              <a:rPr sz="1200" b="0" i="0">
-                <a:solidFill>
-                  <a:srgbClr val="333333"/>
-                </a:solidFill>
-                <a:latin typeface="Calibri"/>
-              </a:rPr>
-              <a:t>Your application logic, branding, business rules.</a:t>
-            </a:r>
-          </a:p>
-          <a:p>
-            <a:pPr>
-              <a:spcAft>
-                <a:spcPts val="400"/>
-              </a:spcAft>
-            </a:pPr>
-            <a:r>
-              <a:rPr sz="1300" b="1" i="0">
-                <a:solidFill>
-                  <a:srgbClr val="663399"/>
-                </a:solidFill>
-                <a:latin typeface="Calibri"/>
-              </a:rPr>
-              <a:t>Contents</a:t>
-            </a:r>
-          </a:p>
-          <a:p>
-            <a:pPr>
-              <a:spcAft>
-                <a:spcPts val="400"/>
-              </a:spcAft>
-            </a:pPr>
-            <a:r>
-              <a:rPr sz="1200" b="0" i="0">
-                <a:solidFill>
-                  <a:srgbClr val="333333"/>
-                </a:solidFill>
-                <a:latin typeface="Calibri"/>
-              </a:rPr>
-              <a:t>• Application recipes</a:t>
-            </a:r>
-          </a:p>
-          <a:p>
-            <a:pPr>
-              <a:spcAft>
-                <a:spcPts val="400"/>
-              </a:spcAft>
-            </a:pPr>
-            <a:r>
-              <a:rPr sz="1200" b="0" i="0">
-                <a:solidFill>
-                  <a:srgbClr val="333333"/>
-                </a:solidFill>
-                <a:latin typeface="Calibri"/>
-              </a:rPr>
-              <a:t>• Custom systemd units</a:t>
-            </a:r>
-          </a:p>
-          <a:p>
-            <a:pPr>
-              <a:spcAft>
-                <a:spcPts val="400"/>
-              </a:spcAft>
-            </a:pPr>
-            <a:r>
-              <a:rPr sz="1200" b="0" i="0">
-                <a:solidFill>
-                  <a:srgbClr val="333333"/>
-                </a:solidFill>
-                <a:latin typeface="Calibri"/>
-              </a:rPr>
-              <a:t>• Branding (splash, hostname)</a:t>
-            </a:r>
-          </a:p>
-          <a:p>
-            <a:pPr>
-              <a:spcAft>
-                <a:spcPts val="400"/>
-              </a:spcAft>
-            </a:pPr>
-            <a:r>
-              <a:rPr sz="1200" b="0" i="0">
-                <a:solidFill>
-                  <a:srgbClr val="333333"/>
-                </a:solidFill>
-                <a:latin typeface="Calibri"/>
-              </a:rPr>
-              <a:t>• Image recipes</a:t>
-            </a:r>
-          </a:p>
-          <a:p>
-            <a:pPr>
-              <a:spcAft>
-                <a:spcPts val="400"/>
-              </a:spcAft>
-            </a:pPr>
-            <a:r>
-              <a:rPr sz="1200" b="0" i="0">
-                <a:solidFill>
-                  <a:srgbClr val="333333"/>
-                </a:solidFill>
-                <a:latin typeface="Calibri"/>
-              </a:rPr>
-              <a:t>• Per-product DT overlays</a:t>
-            </a:r>
-          </a:p>
-          <a:p>
-            <a:pPr>
-              <a:spcAft>
-                <a:spcPts val="800"/>
-              </a:spcAft>
-            </a:pPr>
-            <a:r>
-              <a:rPr sz="1200" b="0" i="0">
-                <a:solidFill>
-                  <a:srgbClr val="333333"/>
-                </a:solidFill>
-                <a:latin typeface="Calibri"/>
-              </a:rPr>
-              <a:t>• Customer-specific configs</a:t>
-            </a:r>
-          </a:p>
-          <a:p>
-            <a:pPr>
-              <a:spcAft>
-                <a:spcPts val="400"/>
-              </a:spcAft>
-            </a:pPr>
-            <a:r>
-              <a:rPr sz="1300" b="1" i="0">
-                <a:solidFill>
-                  <a:srgbClr val="663399"/>
-                </a:solidFill>
-                <a:latin typeface="Calibri"/>
-              </a:rPr>
-              <a:t>Reused</a:t>
-            </a:r>
-          </a:p>
-          <a:p>
-            <a:pPr>
-              <a:spcAft>
-                <a:spcPts val="400"/>
-              </a:spcAft>
-            </a:pPr>
-            <a:r>
-              <a:rPr sz="1200" b="0" i="1">
-                <a:solidFill>
-                  <a:srgbClr val="333333"/>
-                </a:solidFill>
-                <a:latin typeface="Calibri"/>
-              </a:rPr>
-              <a:t>Just for this product line</a:t>
-            </a:r>
-          </a:p>
-        </p:txBody>
-      </p:sp>
-      <p:sp>
-        <p:nvSpPr>
-          <p:cNvPr id="10" name="Rounded Rectangle 9"/>
-          <p:cNvSpPr/>
-          <p:nvPr/>
-        </p:nvSpPr>
-        <p:spPr>
-          <a:xfrm>
-            <a:off x="822960" y="6217920"/>
-            <a:ext cx="10515600" cy="365760"/>
-          </a:xfrm>
-          <a:prstGeom prst="roundRect">
-            <a:avLst/>
-          </a:prstGeom>
-          <a:solidFill>
-            <a:srgbClr val="FBE6F0"/>
-          </a:solidFill>
-          <a:ln>
-            <a:noFill/>
-          </a:ln>
-          <a:effectLst/>
-        </p:spPr>
-        <p:style>
-          <a:lnRef idx="1">
-            <a:schemeClr val="accent1"/>
-          </a:lnRef>
-          <a:fillRef idx="3">
-            <a:schemeClr val="accent1"/>
-          </a:fillRef>
-          <a:effectRef idx="2">
-            <a:schemeClr val="accent1"/>
-          </a:effectRef>
-          <a:fontRef idx="minor">
-            <a:schemeClr val="lt1"/>
-          </a:fontRef>
-        </p:style>
-        <p:txBody>
-          <a:bodyPr rtlCol="0" anchor="ctr" lIns="228600" rIns="228600" wrap="square"/>
-          <a:lstStyle/>
-          <a:p>
-            <a:pPr algn="l"/>
-            <a:r>
-              <a:rPr sz="1200" b="1">
-                <a:solidFill>
-                  <a:srgbClr val="663399"/>
-                </a:solidFill>
-                <a:latin typeface="Calibri"/>
-              </a:rPr>
-              <a:t>Why split? When you ship a new product on the same hardware, only meta-yourproduct changes.</a:t>
+              <a:t> diagnosing failures fast</a:t>
             </a:r>
           </a:p>
         </p:txBody>
